--- a/dotdir/.claude/skills/mclab-slide-design/assets/reference.pptx
+++ b/dotdir/.claude/skills/mclab-slide-design/assets/reference.pptx
@@ -1837,17 +1837,19 @@
       </p:sp>
       <p:sp>
         <p:nvSpPr>
-          <p:cNvPr id="8" name="結論帯の背景">
-            <a:extLst xmlns:a="http://schemas.openxmlformats.org/drawingml/2006/main">
-              <a:ext uri="{FF2B5EF4-FFF2-40B4-BE49-F238E27FC236}">
-                <a16:creationId xmlns:a16="http://schemas.microsoft.com/office/drawing/2014/main" id="{F9279341-E6EE-4A18-A553-45B8BC69D29E}"/>
-              </a:ext>
-            </a:extLst>
-          </p:cNvPr>
-          <p:cNvSpPr>
-            <a:spLocks xmlns:a="http://schemas.openxmlformats.org/drawingml/2006/main" noGrp="1"/>
-          </p:cNvSpPr>
-          <p:nvPr/>
+          <p:cNvPr id="9" name="結論ラベル">
+            <a:extLst xmlns:a="http://schemas.openxmlformats.org/drawingml/2006/main">
+              <a:ext uri="{FF2B5EF4-FFF2-40B4-BE49-F238E27FC236}">
+                <a16:creationId xmlns:a16="http://schemas.microsoft.com/office/drawing/2014/main" id="{B89147E5-C6DB-436A-B5DC-78071A925468}"/>
+              </a:ext>
+            </a:extLst>
+          </p:cNvPr>
+          <p:cNvSpPr>
+            <a:spLocks xmlns:a="http://schemas.openxmlformats.org/drawingml/2006/main" noGrp="1"/>
+          </p:cNvSpPr>
+          <p:nvPr>
+            <p:ph type="body" idx="80"/>
+          </p:nvPr>
         </p:nvSpPr>
         <p:spPr>
           <a:xfrm xmlns:a="http://schemas.openxmlformats.org/drawingml/2006/main">
@@ -1865,27 +1867,67 @@
             <a:prstDash val="solid"/>
           </a:ln>
         </p:spPr>
-      </p:sp>
-      <p:sp>
-        <p:nvSpPr>
-          <p:cNvPr id="9" name="結論ラベル">
-            <a:extLst xmlns:a="http://schemas.openxmlformats.org/drawingml/2006/main">
-              <a:ext uri="{FF2B5EF4-FFF2-40B4-BE49-F238E27FC236}">
-                <a16:creationId xmlns:a16="http://schemas.microsoft.com/office/drawing/2014/main" id="{B89147E5-C6DB-436A-B5DC-78071A925468}"/>
-              </a:ext>
-            </a:extLst>
-          </p:cNvPr>
-          <p:cNvSpPr>
-            <a:spLocks xmlns:a="http://schemas.openxmlformats.org/drawingml/2006/main" noGrp="1"/>
-          </p:cNvSpPr>
-          <p:nvPr>
-            <p:ph type="body" idx="80"/>
+        <p:txBody>
+          <a:bodyPr xmlns:a="http://schemas.openxmlformats.org/drawingml/2006/main" wrap="square" lIns="228600" tIns="0" rIns="0" bIns="0" anchor="ctr">
+            <a:noAutofit/>
+          </a:bodyPr>
+          <a:lstStyle xmlns:a="http://schemas.openxmlformats.org/drawingml/2006/main">
+            <a:lvl1pPr>
+              <a:defRPr sz="1650" b="1">
+                <a:solidFill>
+                  <a:schemeClr val="lt1"/>
+                </a:solidFill>
+                <a:latin typeface="+mn-lt"/>
+                <a:ea typeface="+mn-ea"/>
+                <a:cs typeface="+mn-cs"/>
+              </a:defRPr>
+            </a:lvl1pPr>
+          </a:lstStyle>
+          <a:p xmlns:a="http://schemas.openxmlformats.org/drawingml/2006/main">
+            <a:pPr>
+              <a:defRPr sz="1650" b="1">
+                <a:solidFill>
+                  <a:schemeClr val="lt1"/>
+                </a:solidFill>
+                <a:latin typeface="+mn-lt"/>
+                <a:ea typeface="+mn-ea"/>
+                <a:cs typeface="+mn-cs"/>
+              </a:defRPr>
+            </a:pPr>
+            <a:r>
+              <a:rPr sz="1650" b="1">
+                <a:solidFill>
+                  <a:schemeClr val="lt1"/>
+                </a:solidFill>
+                <a:latin typeface="+mn-lt"/>
+                <a:ea typeface="+mn-ea"/>
+                <a:cs typeface="+mn-cs"/>
+              </a:rPr>
+              <a:t>結論ラベル</a:t>
+            </a:r>
+          </a:p>
+        </p:txBody>
+      </p:sp>
+      <p:sp>
+        <p:nvSpPr>
+          <p:cNvPr id="10" name="結論本文">
+            <a:extLst xmlns:a="http://schemas.openxmlformats.org/drawingml/2006/main">
+              <a:ext uri="{FF2B5EF4-FFF2-40B4-BE49-F238E27FC236}">
+                <a16:creationId xmlns:a16="http://schemas.microsoft.com/office/drawing/2014/main" id="{D3F5285D-A325-41DC-8517-6F48977EF8AF}"/>
+              </a:ext>
+            </a:extLst>
+          </p:cNvPr>
+          <p:cNvSpPr>
+            <a:spLocks xmlns:a="http://schemas.openxmlformats.org/drawingml/2006/main" noGrp="1"/>
+          </p:cNvSpPr>
+          <p:nvPr>
+            <p:ph type="body" idx="81"/>
           </p:nvPr>
         </p:nvSpPr>
         <p:spPr>
           <a:xfrm xmlns:a="http://schemas.openxmlformats.org/drawingml/2006/main">
-            <a:off x="723900" y="6019800"/>
-            <a:ext cx="1809750" cy="361950"/>
+            <a:off x="2647950" y="5848350"/>
+            <a:ext cx="8820150" cy="647700"/>
           </a:xfrm>
           <a:prstGeom xmlns:a="http://schemas.openxmlformats.org/drawingml/2006/main" prst="rect">
             <a:avLst/>
@@ -1897,78 +1939,7 @@
           </a:ln>
         </p:spPr>
         <p:txBody>
-          <a:bodyPr xmlns:a="http://schemas.openxmlformats.org/drawingml/2006/main" wrap="square" lIns="0" tIns="0" rIns="0" bIns="0" anchor="t">
-            <a:noAutofit/>
-          </a:bodyPr>
-          <a:lstStyle xmlns:a="http://schemas.openxmlformats.org/drawingml/2006/main">
-            <a:lvl1pPr>
-              <a:defRPr sz="1650" b="1">
-                <a:solidFill>
-                  <a:schemeClr val="lt1"/>
-                </a:solidFill>
-                <a:latin typeface="+mn-lt"/>
-                <a:ea typeface="+mn-ea"/>
-                <a:cs typeface="+mn-cs"/>
-              </a:defRPr>
-            </a:lvl1pPr>
-          </a:lstStyle>
-          <a:p xmlns:a="http://schemas.openxmlformats.org/drawingml/2006/main">
-            <a:pPr>
-              <a:defRPr sz="1650" b="1">
-                <a:solidFill>
-                  <a:schemeClr val="lt1"/>
-                </a:solidFill>
-                <a:latin typeface="+mn-lt"/>
-                <a:ea typeface="+mn-ea"/>
-                <a:cs typeface="+mn-cs"/>
-              </a:defRPr>
-            </a:pPr>
-            <a:r>
-              <a:rPr sz="1650" b="1">
-                <a:solidFill>
-                  <a:schemeClr val="lt1"/>
-                </a:solidFill>
-                <a:latin typeface="+mn-lt"/>
-                <a:ea typeface="+mn-ea"/>
-                <a:cs typeface="+mn-cs"/>
-              </a:rPr>
-              <a:t>結論ラベル</a:t>
-            </a:r>
-          </a:p>
-        </p:txBody>
-      </p:sp>
-      <p:sp>
-        <p:nvSpPr>
-          <p:cNvPr id="10" name="結論本文">
-            <a:extLst xmlns:a="http://schemas.openxmlformats.org/drawingml/2006/main">
-              <a:ext uri="{FF2B5EF4-FFF2-40B4-BE49-F238E27FC236}">
-                <a16:creationId xmlns:a16="http://schemas.microsoft.com/office/drawing/2014/main" id="{D3F5285D-A325-41DC-8517-6F48977EF8AF}"/>
-              </a:ext>
-            </a:extLst>
-          </p:cNvPr>
-          <p:cNvSpPr>
-            <a:spLocks xmlns:a="http://schemas.openxmlformats.org/drawingml/2006/main" noGrp="1"/>
-          </p:cNvSpPr>
-          <p:nvPr>
-            <p:ph type="body" idx="81"/>
-          </p:nvPr>
-        </p:nvSpPr>
-        <p:spPr>
-          <a:xfrm xmlns:a="http://schemas.openxmlformats.org/drawingml/2006/main">
-            <a:off x="2647950" y="5981700"/>
-            <a:ext cx="8820150" cy="457200"/>
-          </a:xfrm>
-          <a:prstGeom xmlns:a="http://schemas.openxmlformats.org/drawingml/2006/main" prst="rect">
-            <a:avLst/>
-          </a:prstGeom>
-          <a:noFill xmlns:a="http://schemas.openxmlformats.org/drawingml/2006/main"/>
-          <a:ln xmlns:a="http://schemas.openxmlformats.org/drawingml/2006/main" w="0">
-            <a:noFill/>
-            <a:prstDash val="solid"/>
-          </a:ln>
-        </p:spPr>
-        <p:txBody>
-          <a:bodyPr xmlns:a="http://schemas.openxmlformats.org/drawingml/2006/main" wrap="square" lIns="0" tIns="0" rIns="0" bIns="0" anchor="t">
+          <a:bodyPr xmlns:a="http://schemas.openxmlformats.org/drawingml/2006/main" wrap="square" lIns="0" tIns="0" rIns="0" bIns="0" anchor="ctr">
             <a:noAutofit/>
           </a:bodyPr>
           <a:lstStyle xmlns:a="http://schemas.openxmlformats.org/drawingml/2006/main">
@@ -2536,17 +2507,19 @@
       </p:sp>
       <p:sp>
         <p:nvSpPr>
-          <p:cNvPr id="9" name="結論帯の背景">
-            <a:extLst xmlns:a="http://schemas.openxmlformats.org/drawingml/2006/main">
-              <a:ext uri="{FF2B5EF4-FFF2-40B4-BE49-F238E27FC236}">
-                <a16:creationId xmlns:a16="http://schemas.microsoft.com/office/drawing/2014/main" id="{6EF89758-E6E0-4859-AD75-567AF1462684}"/>
-              </a:ext>
-            </a:extLst>
-          </p:cNvPr>
-          <p:cNvSpPr>
-            <a:spLocks xmlns:a="http://schemas.openxmlformats.org/drawingml/2006/main" noGrp="1"/>
-          </p:cNvSpPr>
-          <p:nvPr/>
+          <p:cNvPr id="10" name="結論ラベル">
+            <a:extLst xmlns:a="http://schemas.openxmlformats.org/drawingml/2006/main">
+              <a:ext uri="{FF2B5EF4-FFF2-40B4-BE49-F238E27FC236}">
+                <a16:creationId xmlns:a16="http://schemas.microsoft.com/office/drawing/2014/main" id="{D3BEA784-9CF0-4935-88E9-34369DE0D0CF}"/>
+              </a:ext>
+            </a:extLst>
+          </p:cNvPr>
+          <p:cNvSpPr>
+            <a:spLocks xmlns:a="http://schemas.openxmlformats.org/drawingml/2006/main" noGrp="1"/>
+          </p:cNvSpPr>
+          <p:nvPr>
+            <p:ph type="body" idx="80"/>
+          </p:nvPr>
         </p:nvSpPr>
         <p:spPr>
           <a:xfrm xmlns:a="http://schemas.openxmlformats.org/drawingml/2006/main">
@@ -2564,27 +2537,67 @@
             <a:prstDash val="solid"/>
           </a:ln>
         </p:spPr>
-      </p:sp>
-      <p:sp>
-        <p:nvSpPr>
-          <p:cNvPr id="10" name="結論ラベル">
-            <a:extLst xmlns:a="http://schemas.openxmlformats.org/drawingml/2006/main">
-              <a:ext uri="{FF2B5EF4-FFF2-40B4-BE49-F238E27FC236}">
-                <a16:creationId xmlns:a16="http://schemas.microsoft.com/office/drawing/2014/main" id="{D3BEA784-9CF0-4935-88E9-34369DE0D0CF}"/>
-              </a:ext>
-            </a:extLst>
-          </p:cNvPr>
-          <p:cNvSpPr>
-            <a:spLocks xmlns:a="http://schemas.openxmlformats.org/drawingml/2006/main" noGrp="1"/>
-          </p:cNvSpPr>
-          <p:nvPr>
-            <p:ph type="body" idx="80"/>
+        <p:txBody>
+          <a:bodyPr xmlns:a="http://schemas.openxmlformats.org/drawingml/2006/main" wrap="square" lIns="228600" tIns="0" rIns="0" bIns="0" anchor="ctr">
+            <a:noAutofit/>
+          </a:bodyPr>
+          <a:lstStyle xmlns:a="http://schemas.openxmlformats.org/drawingml/2006/main">
+            <a:lvl1pPr>
+              <a:defRPr sz="1650" b="1">
+                <a:solidFill>
+                  <a:schemeClr val="accent2"/>
+                </a:solidFill>
+                <a:latin typeface="+mn-lt"/>
+                <a:ea typeface="+mn-ea"/>
+                <a:cs typeface="+mn-cs"/>
+              </a:defRPr>
+            </a:lvl1pPr>
+          </a:lstStyle>
+          <a:p xmlns:a="http://schemas.openxmlformats.org/drawingml/2006/main">
+            <a:pPr>
+              <a:defRPr sz="1650" b="1">
+                <a:solidFill>
+                  <a:schemeClr val="accent2"/>
+                </a:solidFill>
+                <a:latin typeface="+mn-lt"/>
+                <a:ea typeface="+mn-ea"/>
+                <a:cs typeface="+mn-cs"/>
+              </a:defRPr>
+            </a:pPr>
+            <a:r>
+              <a:rPr sz="1650" b="1">
+                <a:solidFill>
+                  <a:schemeClr val="accent2"/>
+                </a:solidFill>
+                <a:latin typeface="+mn-lt"/>
+                <a:ea typeface="+mn-ea"/>
+                <a:cs typeface="+mn-cs"/>
+              </a:rPr>
+              <a:t>結論ラベル</a:t>
+            </a:r>
+          </a:p>
+        </p:txBody>
+      </p:sp>
+      <p:sp>
+        <p:nvSpPr>
+          <p:cNvPr id="11" name="結論本文">
+            <a:extLst xmlns:a="http://schemas.openxmlformats.org/drawingml/2006/main">
+              <a:ext uri="{FF2B5EF4-FFF2-40B4-BE49-F238E27FC236}">
+                <a16:creationId xmlns:a16="http://schemas.microsoft.com/office/drawing/2014/main" id="{92AA46EE-5F98-4B04-9693-08C1E2045C62}"/>
+              </a:ext>
+            </a:extLst>
+          </p:cNvPr>
+          <p:cNvSpPr>
+            <a:spLocks xmlns:a="http://schemas.openxmlformats.org/drawingml/2006/main" noGrp="1"/>
+          </p:cNvSpPr>
+          <p:nvPr>
+            <p:ph type="body" idx="81"/>
           </p:nvPr>
         </p:nvSpPr>
         <p:spPr>
           <a:xfrm xmlns:a="http://schemas.openxmlformats.org/drawingml/2006/main">
-            <a:off x="723900" y="5829300"/>
-            <a:ext cx="1809750" cy="361950"/>
+            <a:off x="2647950" y="5657850"/>
+            <a:ext cx="8820150" cy="647700"/>
           </a:xfrm>
           <a:prstGeom xmlns:a="http://schemas.openxmlformats.org/drawingml/2006/main" prst="rect">
             <a:avLst/>
@@ -2596,78 +2609,7 @@
           </a:ln>
         </p:spPr>
         <p:txBody>
-          <a:bodyPr xmlns:a="http://schemas.openxmlformats.org/drawingml/2006/main" wrap="square" lIns="0" tIns="0" rIns="0" bIns="0" anchor="t">
-            <a:noAutofit/>
-          </a:bodyPr>
-          <a:lstStyle xmlns:a="http://schemas.openxmlformats.org/drawingml/2006/main">
-            <a:lvl1pPr>
-              <a:defRPr sz="1650" b="1">
-                <a:solidFill>
-                  <a:schemeClr val="accent2"/>
-                </a:solidFill>
-                <a:latin typeface="+mn-lt"/>
-                <a:ea typeface="+mn-ea"/>
-                <a:cs typeface="+mn-cs"/>
-              </a:defRPr>
-            </a:lvl1pPr>
-          </a:lstStyle>
-          <a:p xmlns:a="http://schemas.openxmlformats.org/drawingml/2006/main">
-            <a:pPr>
-              <a:defRPr sz="1650" b="1">
-                <a:solidFill>
-                  <a:schemeClr val="accent2"/>
-                </a:solidFill>
-                <a:latin typeface="+mn-lt"/>
-                <a:ea typeface="+mn-ea"/>
-                <a:cs typeface="+mn-cs"/>
-              </a:defRPr>
-            </a:pPr>
-            <a:r>
-              <a:rPr sz="1650" b="1">
-                <a:solidFill>
-                  <a:schemeClr val="accent2"/>
-                </a:solidFill>
-                <a:latin typeface="+mn-lt"/>
-                <a:ea typeface="+mn-ea"/>
-                <a:cs typeface="+mn-cs"/>
-              </a:rPr>
-              <a:t>結論ラベル</a:t>
-            </a:r>
-          </a:p>
-        </p:txBody>
-      </p:sp>
-      <p:sp>
-        <p:nvSpPr>
-          <p:cNvPr id="11" name="結論本文">
-            <a:extLst xmlns:a="http://schemas.openxmlformats.org/drawingml/2006/main">
-              <a:ext uri="{FF2B5EF4-FFF2-40B4-BE49-F238E27FC236}">
-                <a16:creationId xmlns:a16="http://schemas.microsoft.com/office/drawing/2014/main" id="{92AA46EE-5F98-4B04-9693-08C1E2045C62}"/>
-              </a:ext>
-            </a:extLst>
-          </p:cNvPr>
-          <p:cNvSpPr>
-            <a:spLocks xmlns:a="http://schemas.openxmlformats.org/drawingml/2006/main" noGrp="1"/>
-          </p:cNvSpPr>
-          <p:nvPr>
-            <p:ph type="body" idx="81"/>
-          </p:nvPr>
-        </p:nvSpPr>
-        <p:spPr>
-          <a:xfrm xmlns:a="http://schemas.openxmlformats.org/drawingml/2006/main">
-            <a:off x="2647950" y="5791200"/>
-            <a:ext cx="8820150" cy="457200"/>
-          </a:xfrm>
-          <a:prstGeom xmlns:a="http://schemas.openxmlformats.org/drawingml/2006/main" prst="rect">
-            <a:avLst/>
-          </a:prstGeom>
-          <a:noFill xmlns:a="http://schemas.openxmlformats.org/drawingml/2006/main"/>
-          <a:ln xmlns:a="http://schemas.openxmlformats.org/drawingml/2006/main" w="0">
-            <a:noFill/>
-            <a:prstDash val="solid"/>
-          </a:ln>
-        </p:spPr>
-        <p:txBody>
-          <a:bodyPr xmlns:a="http://schemas.openxmlformats.org/drawingml/2006/main" wrap="square" lIns="0" tIns="0" rIns="0" bIns="0" anchor="t">
+          <a:bodyPr xmlns:a="http://schemas.openxmlformats.org/drawingml/2006/main" wrap="square" lIns="0" tIns="0" rIns="0" bIns="0" anchor="ctr">
             <a:noAutofit/>
           </a:bodyPr>
           <a:lstStyle xmlns:a="http://schemas.openxmlformats.org/drawingml/2006/main">
@@ -4273,17 +4215,19 @@
       </p:sp>
       <p:sp>
         <p:nvSpPr>
-          <p:cNvPr id="27" name="結論帯の背景">
-            <a:extLst xmlns:a="http://schemas.openxmlformats.org/drawingml/2006/main">
-              <a:ext uri="{FF2B5EF4-FFF2-40B4-BE49-F238E27FC236}">
-                <a16:creationId xmlns:a16="http://schemas.microsoft.com/office/drawing/2014/main" id="{F43CFB14-77DF-4449-8C4E-C3AD00046C7E}"/>
-              </a:ext>
-            </a:extLst>
-          </p:cNvPr>
-          <p:cNvSpPr>
-            <a:spLocks xmlns:a="http://schemas.openxmlformats.org/drawingml/2006/main" noGrp="1"/>
-          </p:cNvSpPr>
-          <p:nvPr/>
+          <p:cNvPr id="28" name="結論ラベル">
+            <a:extLst xmlns:a="http://schemas.openxmlformats.org/drawingml/2006/main">
+              <a:ext uri="{FF2B5EF4-FFF2-40B4-BE49-F238E27FC236}">
+                <a16:creationId xmlns:a16="http://schemas.microsoft.com/office/drawing/2014/main" id="{4F1274DF-089C-4439-909B-C4CEEABD1EE5}"/>
+              </a:ext>
+            </a:extLst>
+          </p:cNvPr>
+          <p:cNvSpPr>
+            <a:spLocks xmlns:a="http://schemas.openxmlformats.org/drawingml/2006/main" noGrp="1"/>
+          </p:cNvSpPr>
+          <p:nvPr>
+            <p:ph type="body" idx="80"/>
+          </p:nvPr>
         </p:nvSpPr>
         <p:spPr>
           <a:xfrm xmlns:a="http://schemas.openxmlformats.org/drawingml/2006/main">
@@ -4301,27 +4245,67 @@
             <a:prstDash val="solid"/>
           </a:ln>
         </p:spPr>
-      </p:sp>
-      <p:sp>
-        <p:nvSpPr>
-          <p:cNvPr id="28" name="結論ラベル">
-            <a:extLst xmlns:a="http://schemas.openxmlformats.org/drawingml/2006/main">
-              <a:ext uri="{FF2B5EF4-FFF2-40B4-BE49-F238E27FC236}">
-                <a16:creationId xmlns:a16="http://schemas.microsoft.com/office/drawing/2014/main" id="{4F1274DF-089C-4439-909B-C4CEEABD1EE5}"/>
-              </a:ext>
-            </a:extLst>
-          </p:cNvPr>
-          <p:cNvSpPr>
-            <a:spLocks xmlns:a="http://schemas.openxmlformats.org/drawingml/2006/main" noGrp="1"/>
-          </p:cNvSpPr>
-          <p:nvPr>
-            <p:ph type="body" idx="80"/>
+        <p:txBody>
+          <a:bodyPr xmlns:a="http://schemas.openxmlformats.org/drawingml/2006/main" wrap="square" lIns="228600" tIns="0" rIns="0" bIns="0" anchor="ctr">
+            <a:noAutofit/>
+          </a:bodyPr>
+          <a:lstStyle xmlns:a="http://schemas.openxmlformats.org/drawingml/2006/main">
+            <a:lvl1pPr>
+              <a:defRPr sz="1650" b="1">
+                <a:solidFill>
+                  <a:schemeClr val="lt1"/>
+                </a:solidFill>
+                <a:latin typeface="+mn-lt"/>
+                <a:ea typeface="+mn-ea"/>
+                <a:cs typeface="+mn-cs"/>
+              </a:defRPr>
+            </a:lvl1pPr>
+          </a:lstStyle>
+          <a:p xmlns:a="http://schemas.openxmlformats.org/drawingml/2006/main">
+            <a:pPr>
+              <a:defRPr sz="1650" b="1">
+                <a:solidFill>
+                  <a:schemeClr val="lt1"/>
+                </a:solidFill>
+                <a:latin typeface="+mn-lt"/>
+                <a:ea typeface="+mn-ea"/>
+                <a:cs typeface="+mn-cs"/>
+              </a:defRPr>
+            </a:pPr>
+            <a:r>
+              <a:rPr sz="1650" b="1">
+                <a:solidFill>
+                  <a:schemeClr val="lt1"/>
+                </a:solidFill>
+                <a:latin typeface="+mn-lt"/>
+                <a:ea typeface="+mn-ea"/>
+                <a:cs typeface="+mn-cs"/>
+              </a:rPr>
+              <a:t>結論ラベル</a:t>
+            </a:r>
+          </a:p>
+        </p:txBody>
+      </p:sp>
+      <p:sp>
+        <p:nvSpPr>
+          <p:cNvPr id="29" name="結論本文">
+            <a:extLst xmlns:a="http://schemas.openxmlformats.org/drawingml/2006/main">
+              <a:ext uri="{FF2B5EF4-FFF2-40B4-BE49-F238E27FC236}">
+                <a16:creationId xmlns:a16="http://schemas.microsoft.com/office/drawing/2014/main" id="{97670DA1-05F7-48A3-8507-09185555D4B4}"/>
+              </a:ext>
+            </a:extLst>
+          </p:cNvPr>
+          <p:cNvSpPr>
+            <a:spLocks xmlns:a="http://schemas.openxmlformats.org/drawingml/2006/main" noGrp="1"/>
+          </p:cNvSpPr>
+          <p:nvPr>
+            <p:ph type="body" idx="81"/>
           </p:nvPr>
         </p:nvSpPr>
         <p:spPr>
           <a:xfrm xmlns:a="http://schemas.openxmlformats.org/drawingml/2006/main">
-            <a:off x="723900" y="5829300"/>
-            <a:ext cx="1809750" cy="361950"/>
+            <a:off x="2647950" y="5657850"/>
+            <a:ext cx="8820150" cy="647700"/>
           </a:xfrm>
           <a:prstGeom xmlns:a="http://schemas.openxmlformats.org/drawingml/2006/main" prst="rect">
             <a:avLst/>
@@ -4333,78 +4317,7 @@
           </a:ln>
         </p:spPr>
         <p:txBody>
-          <a:bodyPr xmlns:a="http://schemas.openxmlformats.org/drawingml/2006/main" wrap="square" lIns="0" tIns="0" rIns="0" bIns="0" anchor="t">
-            <a:noAutofit/>
-          </a:bodyPr>
-          <a:lstStyle xmlns:a="http://schemas.openxmlformats.org/drawingml/2006/main">
-            <a:lvl1pPr>
-              <a:defRPr sz="1650" b="1">
-                <a:solidFill>
-                  <a:schemeClr val="lt1"/>
-                </a:solidFill>
-                <a:latin typeface="+mn-lt"/>
-                <a:ea typeface="+mn-ea"/>
-                <a:cs typeface="+mn-cs"/>
-              </a:defRPr>
-            </a:lvl1pPr>
-          </a:lstStyle>
-          <a:p xmlns:a="http://schemas.openxmlformats.org/drawingml/2006/main">
-            <a:pPr>
-              <a:defRPr sz="1650" b="1">
-                <a:solidFill>
-                  <a:schemeClr val="lt1"/>
-                </a:solidFill>
-                <a:latin typeface="+mn-lt"/>
-                <a:ea typeface="+mn-ea"/>
-                <a:cs typeface="+mn-cs"/>
-              </a:defRPr>
-            </a:pPr>
-            <a:r>
-              <a:rPr sz="1650" b="1">
-                <a:solidFill>
-                  <a:schemeClr val="lt1"/>
-                </a:solidFill>
-                <a:latin typeface="+mn-lt"/>
-                <a:ea typeface="+mn-ea"/>
-                <a:cs typeface="+mn-cs"/>
-              </a:rPr>
-              <a:t>結論ラベル</a:t>
-            </a:r>
-          </a:p>
-        </p:txBody>
-      </p:sp>
-      <p:sp>
-        <p:nvSpPr>
-          <p:cNvPr id="29" name="結論本文">
-            <a:extLst xmlns:a="http://schemas.openxmlformats.org/drawingml/2006/main">
-              <a:ext uri="{FF2B5EF4-FFF2-40B4-BE49-F238E27FC236}">
-                <a16:creationId xmlns:a16="http://schemas.microsoft.com/office/drawing/2014/main" id="{97670DA1-05F7-48A3-8507-09185555D4B4}"/>
-              </a:ext>
-            </a:extLst>
-          </p:cNvPr>
-          <p:cNvSpPr>
-            <a:spLocks xmlns:a="http://schemas.openxmlformats.org/drawingml/2006/main" noGrp="1"/>
-          </p:cNvSpPr>
-          <p:nvPr>
-            <p:ph type="body" idx="81"/>
-          </p:nvPr>
-        </p:nvSpPr>
-        <p:spPr>
-          <a:xfrm xmlns:a="http://schemas.openxmlformats.org/drawingml/2006/main">
-            <a:off x="2647950" y="5791200"/>
-            <a:ext cx="8820150" cy="457200"/>
-          </a:xfrm>
-          <a:prstGeom xmlns:a="http://schemas.openxmlformats.org/drawingml/2006/main" prst="rect">
-            <a:avLst/>
-          </a:prstGeom>
-          <a:noFill xmlns:a="http://schemas.openxmlformats.org/drawingml/2006/main"/>
-          <a:ln xmlns:a="http://schemas.openxmlformats.org/drawingml/2006/main" w="0">
-            <a:noFill/>
-            <a:prstDash val="solid"/>
-          </a:ln>
-        </p:spPr>
-        <p:txBody>
-          <a:bodyPr xmlns:a="http://schemas.openxmlformats.org/drawingml/2006/main" wrap="square" lIns="0" tIns="0" rIns="0" bIns="0" anchor="t">
+          <a:bodyPr xmlns:a="http://schemas.openxmlformats.org/drawingml/2006/main" wrap="square" lIns="0" tIns="0" rIns="0" bIns="0" anchor="ctr">
             <a:noAutofit/>
           </a:bodyPr>
           <a:lstStyle xmlns:a="http://schemas.openxmlformats.org/drawingml/2006/main">
@@ -5034,17 +4947,19 @@
       </p:sp>
       <p:sp>
         <p:nvSpPr>
-          <p:cNvPr id="11" name="結論帯の背景">
-            <a:extLst xmlns:a="http://schemas.openxmlformats.org/drawingml/2006/main">
-              <a:ext uri="{FF2B5EF4-FFF2-40B4-BE49-F238E27FC236}">
-                <a16:creationId xmlns:a16="http://schemas.microsoft.com/office/drawing/2014/main" id="{C5C874DA-F6FD-44D1-9527-41CFD739BF57}"/>
-              </a:ext>
-            </a:extLst>
-          </p:cNvPr>
-          <p:cNvSpPr>
-            <a:spLocks xmlns:a="http://schemas.openxmlformats.org/drawingml/2006/main" noGrp="1"/>
-          </p:cNvSpPr>
-          <p:nvPr/>
+          <p:cNvPr id="12" name="結論ラベル">
+            <a:extLst xmlns:a="http://schemas.openxmlformats.org/drawingml/2006/main">
+              <a:ext uri="{FF2B5EF4-FFF2-40B4-BE49-F238E27FC236}">
+                <a16:creationId xmlns:a16="http://schemas.microsoft.com/office/drawing/2014/main" id="{3E6F8315-B092-4D59-8DEC-6F02528196E6}"/>
+              </a:ext>
+            </a:extLst>
+          </p:cNvPr>
+          <p:cNvSpPr>
+            <a:spLocks xmlns:a="http://schemas.openxmlformats.org/drawingml/2006/main" noGrp="1"/>
+          </p:cNvSpPr>
+          <p:nvPr>
+            <p:ph type="body" idx="80"/>
+          </p:nvPr>
         </p:nvSpPr>
         <p:spPr>
           <a:xfrm xmlns:a="http://schemas.openxmlformats.org/drawingml/2006/main">
@@ -5062,27 +4977,67 @@
             <a:prstDash val="solid"/>
           </a:ln>
         </p:spPr>
-      </p:sp>
-      <p:sp>
-        <p:nvSpPr>
-          <p:cNvPr id="12" name="結論ラベル">
-            <a:extLst xmlns:a="http://schemas.openxmlformats.org/drawingml/2006/main">
-              <a:ext uri="{FF2B5EF4-FFF2-40B4-BE49-F238E27FC236}">
-                <a16:creationId xmlns:a16="http://schemas.microsoft.com/office/drawing/2014/main" id="{3E6F8315-B092-4D59-8DEC-6F02528196E6}"/>
-              </a:ext>
-            </a:extLst>
-          </p:cNvPr>
-          <p:cNvSpPr>
-            <a:spLocks xmlns:a="http://schemas.openxmlformats.org/drawingml/2006/main" noGrp="1"/>
-          </p:cNvSpPr>
-          <p:nvPr>
-            <p:ph type="body" idx="80"/>
+        <p:txBody>
+          <a:bodyPr xmlns:a="http://schemas.openxmlformats.org/drawingml/2006/main" wrap="square" lIns="228600" tIns="0" rIns="0" bIns="0" anchor="ctr">
+            <a:noAutofit/>
+          </a:bodyPr>
+          <a:lstStyle xmlns:a="http://schemas.openxmlformats.org/drawingml/2006/main">
+            <a:lvl1pPr>
+              <a:defRPr sz="1650" b="1">
+                <a:solidFill>
+                  <a:schemeClr val="accent2"/>
+                </a:solidFill>
+                <a:latin typeface="+mn-lt"/>
+                <a:ea typeface="+mn-ea"/>
+                <a:cs typeface="+mn-cs"/>
+              </a:defRPr>
+            </a:lvl1pPr>
+          </a:lstStyle>
+          <a:p xmlns:a="http://schemas.openxmlformats.org/drawingml/2006/main">
+            <a:pPr>
+              <a:defRPr sz="1650" b="1">
+                <a:solidFill>
+                  <a:schemeClr val="accent2"/>
+                </a:solidFill>
+                <a:latin typeface="+mn-lt"/>
+                <a:ea typeface="+mn-ea"/>
+                <a:cs typeface="+mn-cs"/>
+              </a:defRPr>
+            </a:pPr>
+            <a:r>
+              <a:rPr sz="1650" b="1">
+                <a:solidFill>
+                  <a:schemeClr val="accent2"/>
+                </a:solidFill>
+                <a:latin typeface="+mn-lt"/>
+                <a:ea typeface="+mn-ea"/>
+                <a:cs typeface="+mn-cs"/>
+              </a:rPr>
+              <a:t>結論ラベル</a:t>
+            </a:r>
+          </a:p>
+        </p:txBody>
+      </p:sp>
+      <p:sp>
+        <p:nvSpPr>
+          <p:cNvPr id="13" name="結論本文">
+            <a:extLst xmlns:a="http://schemas.openxmlformats.org/drawingml/2006/main">
+              <a:ext uri="{FF2B5EF4-FFF2-40B4-BE49-F238E27FC236}">
+                <a16:creationId xmlns:a16="http://schemas.microsoft.com/office/drawing/2014/main" id="{A604CD84-8454-4E33-923E-7A110A5C5572}"/>
+              </a:ext>
+            </a:extLst>
+          </p:cNvPr>
+          <p:cNvSpPr>
+            <a:spLocks xmlns:a="http://schemas.openxmlformats.org/drawingml/2006/main" noGrp="1"/>
+          </p:cNvSpPr>
+          <p:nvPr>
+            <p:ph type="body" idx="81"/>
           </p:nvPr>
         </p:nvSpPr>
         <p:spPr>
           <a:xfrm xmlns:a="http://schemas.openxmlformats.org/drawingml/2006/main">
-            <a:off x="723900" y="5829300"/>
-            <a:ext cx="1809750" cy="361950"/>
+            <a:off x="2647950" y="5657850"/>
+            <a:ext cx="8820150" cy="647700"/>
           </a:xfrm>
           <a:prstGeom xmlns:a="http://schemas.openxmlformats.org/drawingml/2006/main" prst="rect">
             <a:avLst/>
@@ -5094,78 +5049,7 @@
           </a:ln>
         </p:spPr>
         <p:txBody>
-          <a:bodyPr xmlns:a="http://schemas.openxmlformats.org/drawingml/2006/main" wrap="square" lIns="0" tIns="0" rIns="0" bIns="0" anchor="t">
-            <a:noAutofit/>
-          </a:bodyPr>
-          <a:lstStyle xmlns:a="http://schemas.openxmlformats.org/drawingml/2006/main">
-            <a:lvl1pPr>
-              <a:defRPr sz="1650" b="1">
-                <a:solidFill>
-                  <a:schemeClr val="accent2"/>
-                </a:solidFill>
-                <a:latin typeface="+mn-lt"/>
-                <a:ea typeface="+mn-ea"/>
-                <a:cs typeface="+mn-cs"/>
-              </a:defRPr>
-            </a:lvl1pPr>
-          </a:lstStyle>
-          <a:p xmlns:a="http://schemas.openxmlformats.org/drawingml/2006/main">
-            <a:pPr>
-              <a:defRPr sz="1650" b="1">
-                <a:solidFill>
-                  <a:schemeClr val="accent2"/>
-                </a:solidFill>
-                <a:latin typeface="+mn-lt"/>
-                <a:ea typeface="+mn-ea"/>
-                <a:cs typeface="+mn-cs"/>
-              </a:defRPr>
-            </a:pPr>
-            <a:r>
-              <a:rPr sz="1650" b="1">
-                <a:solidFill>
-                  <a:schemeClr val="accent2"/>
-                </a:solidFill>
-                <a:latin typeface="+mn-lt"/>
-                <a:ea typeface="+mn-ea"/>
-                <a:cs typeface="+mn-cs"/>
-              </a:rPr>
-              <a:t>結論ラベル</a:t>
-            </a:r>
-          </a:p>
-        </p:txBody>
-      </p:sp>
-      <p:sp>
-        <p:nvSpPr>
-          <p:cNvPr id="13" name="結論本文">
-            <a:extLst xmlns:a="http://schemas.openxmlformats.org/drawingml/2006/main">
-              <a:ext uri="{FF2B5EF4-FFF2-40B4-BE49-F238E27FC236}">
-                <a16:creationId xmlns:a16="http://schemas.microsoft.com/office/drawing/2014/main" id="{A604CD84-8454-4E33-923E-7A110A5C5572}"/>
-              </a:ext>
-            </a:extLst>
-          </p:cNvPr>
-          <p:cNvSpPr>
-            <a:spLocks xmlns:a="http://schemas.openxmlformats.org/drawingml/2006/main" noGrp="1"/>
-          </p:cNvSpPr>
-          <p:nvPr>
-            <p:ph type="body" idx="81"/>
-          </p:nvPr>
-        </p:nvSpPr>
-        <p:spPr>
-          <a:xfrm xmlns:a="http://schemas.openxmlformats.org/drawingml/2006/main">
-            <a:off x="2647950" y="5791200"/>
-            <a:ext cx="8820150" cy="457200"/>
-          </a:xfrm>
-          <a:prstGeom xmlns:a="http://schemas.openxmlformats.org/drawingml/2006/main" prst="rect">
-            <a:avLst/>
-          </a:prstGeom>
-          <a:noFill xmlns:a="http://schemas.openxmlformats.org/drawingml/2006/main"/>
-          <a:ln xmlns:a="http://schemas.openxmlformats.org/drawingml/2006/main" w="0">
-            <a:noFill/>
-            <a:prstDash val="solid"/>
-          </a:ln>
-        </p:spPr>
-        <p:txBody>
-          <a:bodyPr xmlns:a="http://schemas.openxmlformats.org/drawingml/2006/main" wrap="square" lIns="0" tIns="0" rIns="0" bIns="0" anchor="t">
+          <a:bodyPr xmlns:a="http://schemas.openxmlformats.org/drawingml/2006/main" wrap="square" lIns="0" tIns="0" rIns="0" bIns="0" anchor="ctr">
             <a:noAutofit/>
           </a:bodyPr>
           <a:lstStyle xmlns:a="http://schemas.openxmlformats.org/drawingml/2006/main">
@@ -5591,17 +5475,19 @@
       </p:sp>
       <p:sp>
         <p:nvSpPr>
-          <p:cNvPr id="7" name="結論帯の背景">
-            <a:extLst xmlns:a="http://schemas.openxmlformats.org/drawingml/2006/main">
-              <a:ext uri="{FF2B5EF4-FFF2-40B4-BE49-F238E27FC236}">
-                <a16:creationId xmlns:a16="http://schemas.microsoft.com/office/drawing/2014/main" id="{0E2FFEDE-035F-4BC2-A613-0F652A075999}"/>
-              </a:ext>
-            </a:extLst>
-          </p:cNvPr>
-          <p:cNvSpPr>
-            <a:spLocks xmlns:a="http://schemas.openxmlformats.org/drawingml/2006/main" noGrp="1"/>
-          </p:cNvSpPr>
-          <p:nvPr/>
+          <p:cNvPr id="8" name="結論ラベル">
+            <a:extLst xmlns:a="http://schemas.openxmlformats.org/drawingml/2006/main">
+              <a:ext uri="{FF2B5EF4-FFF2-40B4-BE49-F238E27FC236}">
+                <a16:creationId xmlns:a16="http://schemas.microsoft.com/office/drawing/2014/main" id="{56E4E8BD-CFB8-4A68-AC21-D0D7AC31A444}"/>
+              </a:ext>
+            </a:extLst>
+          </p:cNvPr>
+          <p:cNvSpPr>
+            <a:spLocks xmlns:a="http://schemas.openxmlformats.org/drawingml/2006/main" noGrp="1"/>
+          </p:cNvSpPr>
+          <p:nvPr>
+            <p:ph type="body" idx="80"/>
+          </p:nvPr>
         </p:nvSpPr>
         <p:spPr>
           <a:xfrm xmlns:a="http://schemas.openxmlformats.org/drawingml/2006/main">
@@ -5619,27 +5505,67 @@
             <a:prstDash val="solid"/>
           </a:ln>
         </p:spPr>
-      </p:sp>
-      <p:sp>
-        <p:nvSpPr>
-          <p:cNvPr id="8" name="結論ラベル">
-            <a:extLst xmlns:a="http://schemas.openxmlformats.org/drawingml/2006/main">
-              <a:ext uri="{FF2B5EF4-FFF2-40B4-BE49-F238E27FC236}">
-                <a16:creationId xmlns:a16="http://schemas.microsoft.com/office/drawing/2014/main" id="{56E4E8BD-CFB8-4A68-AC21-D0D7AC31A444}"/>
-              </a:ext>
-            </a:extLst>
-          </p:cNvPr>
-          <p:cNvSpPr>
-            <a:spLocks xmlns:a="http://schemas.openxmlformats.org/drawingml/2006/main" noGrp="1"/>
-          </p:cNvSpPr>
-          <p:nvPr>
-            <p:ph type="body" idx="80"/>
+        <p:txBody>
+          <a:bodyPr xmlns:a="http://schemas.openxmlformats.org/drawingml/2006/main" wrap="square" lIns="228600" tIns="0" rIns="0" bIns="0" anchor="ctr">
+            <a:noAutofit/>
+          </a:bodyPr>
+          <a:lstStyle xmlns:a="http://schemas.openxmlformats.org/drawingml/2006/main">
+            <a:lvl1pPr>
+              <a:defRPr sz="1650" b="1">
+                <a:solidFill>
+                  <a:schemeClr val="accent2"/>
+                </a:solidFill>
+                <a:latin typeface="+mn-lt"/>
+                <a:ea typeface="+mn-ea"/>
+                <a:cs typeface="+mn-cs"/>
+              </a:defRPr>
+            </a:lvl1pPr>
+          </a:lstStyle>
+          <a:p xmlns:a="http://schemas.openxmlformats.org/drawingml/2006/main">
+            <a:pPr>
+              <a:defRPr sz="1650" b="1">
+                <a:solidFill>
+                  <a:schemeClr val="accent2"/>
+                </a:solidFill>
+                <a:latin typeface="+mn-lt"/>
+                <a:ea typeface="+mn-ea"/>
+                <a:cs typeface="+mn-cs"/>
+              </a:defRPr>
+            </a:pPr>
+            <a:r>
+              <a:rPr sz="1650" b="1">
+                <a:solidFill>
+                  <a:schemeClr val="accent2"/>
+                </a:solidFill>
+                <a:latin typeface="+mn-lt"/>
+                <a:ea typeface="+mn-ea"/>
+                <a:cs typeface="+mn-cs"/>
+              </a:rPr>
+              <a:t>結論ラベル</a:t>
+            </a:r>
+          </a:p>
+        </p:txBody>
+      </p:sp>
+      <p:sp>
+        <p:nvSpPr>
+          <p:cNvPr id="9" name="結論本文">
+            <a:extLst xmlns:a="http://schemas.openxmlformats.org/drawingml/2006/main">
+              <a:ext uri="{FF2B5EF4-FFF2-40B4-BE49-F238E27FC236}">
+                <a16:creationId xmlns:a16="http://schemas.microsoft.com/office/drawing/2014/main" id="{19DB8C82-4CBB-4BF7-AB96-2BDF677A5D9F}"/>
+              </a:ext>
+            </a:extLst>
+          </p:cNvPr>
+          <p:cNvSpPr>
+            <a:spLocks xmlns:a="http://schemas.openxmlformats.org/drawingml/2006/main" noGrp="1"/>
+          </p:cNvSpPr>
+          <p:nvPr>
+            <p:ph type="body" idx="81"/>
           </p:nvPr>
         </p:nvSpPr>
         <p:spPr>
           <a:xfrm xmlns:a="http://schemas.openxmlformats.org/drawingml/2006/main">
-            <a:off x="723900" y="5829300"/>
-            <a:ext cx="1809750" cy="361950"/>
+            <a:off x="2647950" y="5657850"/>
+            <a:ext cx="8820150" cy="647700"/>
           </a:xfrm>
           <a:prstGeom xmlns:a="http://schemas.openxmlformats.org/drawingml/2006/main" prst="rect">
             <a:avLst/>
@@ -5651,78 +5577,7 @@
           </a:ln>
         </p:spPr>
         <p:txBody>
-          <a:bodyPr xmlns:a="http://schemas.openxmlformats.org/drawingml/2006/main" wrap="square" lIns="0" tIns="0" rIns="0" bIns="0" anchor="t">
-            <a:noAutofit/>
-          </a:bodyPr>
-          <a:lstStyle xmlns:a="http://schemas.openxmlformats.org/drawingml/2006/main">
-            <a:lvl1pPr>
-              <a:defRPr sz="1650" b="1">
-                <a:solidFill>
-                  <a:schemeClr val="accent2"/>
-                </a:solidFill>
-                <a:latin typeface="+mn-lt"/>
-                <a:ea typeface="+mn-ea"/>
-                <a:cs typeface="+mn-cs"/>
-              </a:defRPr>
-            </a:lvl1pPr>
-          </a:lstStyle>
-          <a:p xmlns:a="http://schemas.openxmlformats.org/drawingml/2006/main">
-            <a:pPr>
-              <a:defRPr sz="1650" b="1">
-                <a:solidFill>
-                  <a:schemeClr val="accent2"/>
-                </a:solidFill>
-                <a:latin typeface="+mn-lt"/>
-                <a:ea typeface="+mn-ea"/>
-                <a:cs typeface="+mn-cs"/>
-              </a:defRPr>
-            </a:pPr>
-            <a:r>
-              <a:rPr sz="1650" b="1">
-                <a:solidFill>
-                  <a:schemeClr val="accent2"/>
-                </a:solidFill>
-                <a:latin typeface="+mn-lt"/>
-                <a:ea typeface="+mn-ea"/>
-                <a:cs typeface="+mn-cs"/>
-              </a:rPr>
-              <a:t>結論ラベル</a:t>
-            </a:r>
-          </a:p>
-        </p:txBody>
-      </p:sp>
-      <p:sp>
-        <p:nvSpPr>
-          <p:cNvPr id="9" name="結論本文">
-            <a:extLst xmlns:a="http://schemas.openxmlformats.org/drawingml/2006/main">
-              <a:ext uri="{FF2B5EF4-FFF2-40B4-BE49-F238E27FC236}">
-                <a16:creationId xmlns:a16="http://schemas.microsoft.com/office/drawing/2014/main" id="{19DB8C82-4CBB-4BF7-AB96-2BDF677A5D9F}"/>
-              </a:ext>
-            </a:extLst>
-          </p:cNvPr>
-          <p:cNvSpPr>
-            <a:spLocks xmlns:a="http://schemas.openxmlformats.org/drawingml/2006/main" noGrp="1"/>
-          </p:cNvSpPr>
-          <p:nvPr>
-            <p:ph type="body" idx="81"/>
-          </p:nvPr>
-        </p:nvSpPr>
-        <p:spPr>
-          <a:xfrm xmlns:a="http://schemas.openxmlformats.org/drawingml/2006/main">
-            <a:off x="2647950" y="5791200"/>
-            <a:ext cx="8820150" cy="457200"/>
-          </a:xfrm>
-          <a:prstGeom xmlns:a="http://schemas.openxmlformats.org/drawingml/2006/main" prst="rect">
-            <a:avLst/>
-          </a:prstGeom>
-          <a:noFill xmlns:a="http://schemas.openxmlformats.org/drawingml/2006/main"/>
-          <a:ln xmlns:a="http://schemas.openxmlformats.org/drawingml/2006/main" w="0">
-            <a:noFill/>
-            <a:prstDash val="solid"/>
-          </a:ln>
-        </p:spPr>
-        <p:txBody>
-          <a:bodyPr xmlns:a="http://schemas.openxmlformats.org/drawingml/2006/main" wrap="square" lIns="0" tIns="0" rIns="0" bIns="0" anchor="t">
+          <a:bodyPr xmlns:a="http://schemas.openxmlformats.org/drawingml/2006/main" wrap="square" lIns="0" tIns="0" rIns="0" bIns="0" anchor="ctr">
             <a:noAutofit/>
           </a:bodyPr>
           <a:lstStyle xmlns:a="http://schemas.openxmlformats.org/drawingml/2006/main">
@@ -6077,17 +5932,19 @@
       </p:sp>
       <p:sp>
         <p:nvSpPr>
-          <p:cNvPr id="6" name="結論帯の背景">
-            <a:extLst xmlns:a="http://schemas.openxmlformats.org/drawingml/2006/main">
-              <a:ext uri="{FF2B5EF4-FFF2-40B4-BE49-F238E27FC236}">
-                <a16:creationId xmlns:a16="http://schemas.microsoft.com/office/drawing/2014/main" id="{5B59E308-DAC3-43DB-AD72-052F2FD54A78}"/>
-              </a:ext>
-            </a:extLst>
-          </p:cNvPr>
-          <p:cNvSpPr>
-            <a:spLocks xmlns:a="http://schemas.openxmlformats.org/drawingml/2006/main" noGrp="1"/>
-          </p:cNvSpPr>
-          <p:nvPr/>
+          <p:cNvPr id="7" name="結論ラベル">
+            <a:extLst xmlns:a="http://schemas.openxmlformats.org/drawingml/2006/main">
+              <a:ext uri="{FF2B5EF4-FFF2-40B4-BE49-F238E27FC236}">
+                <a16:creationId xmlns:a16="http://schemas.microsoft.com/office/drawing/2014/main" id="{D960C886-9814-485D-A9F3-AB1B33CFF0AD}"/>
+              </a:ext>
+            </a:extLst>
+          </p:cNvPr>
+          <p:cNvSpPr>
+            <a:spLocks xmlns:a="http://schemas.openxmlformats.org/drawingml/2006/main" noGrp="1"/>
+          </p:cNvSpPr>
+          <p:nvPr>
+            <p:ph type="body" idx="80"/>
+          </p:nvPr>
         </p:nvSpPr>
         <p:spPr>
           <a:xfrm xmlns:a="http://schemas.openxmlformats.org/drawingml/2006/main">
@@ -6105,27 +5962,67 @@
             <a:prstDash val="solid"/>
           </a:ln>
         </p:spPr>
-      </p:sp>
-      <p:sp>
-        <p:nvSpPr>
-          <p:cNvPr id="7" name="結論ラベル">
-            <a:extLst xmlns:a="http://schemas.openxmlformats.org/drawingml/2006/main">
-              <a:ext uri="{FF2B5EF4-FFF2-40B4-BE49-F238E27FC236}">
-                <a16:creationId xmlns:a16="http://schemas.microsoft.com/office/drawing/2014/main" id="{D960C886-9814-485D-A9F3-AB1B33CFF0AD}"/>
-              </a:ext>
-            </a:extLst>
-          </p:cNvPr>
-          <p:cNvSpPr>
-            <a:spLocks xmlns:a="http://schemas.openxmlformats.org/drawingml/2006/main" noGrp="1"/>
-          </p:cNvSpPr>
-          <p:nvPr>
-            <p:ph type="body" idx="80"/>
+        <p:txBody>
+          <a:bodyPr xmlns:a="http://schemas.openxmlformats.org/drawingml/2006/main" wrap="square" lIns="228600" tIns="0" rIns="0" bIns="0" anchor="ctr">
+            <a:noAutofit/>
+          </a:bodyPr>
+          <a:lstStyle xmlns:a="http://schemas.openxmlformats.org/drawingml/2006/main">
+            <a:lvl1pPr>
+              <a:defRPr sz="1650" b="1">
+                <a:solidFill>
+                  <a:schemeClr val="accent4"/>
+                </a:solidFill>
+                <a:latin typeface="+mn-lt"/>
+                <a:ea typeface="+mn-ea"/>
+                <a:cs typeface="+mn-cs"/>
+              </a:defRPr>
+            </a:lvl1pPr>
+          </a:lstStyle>
+          <a:p xmlns:a="http://schemas.openxmlformats.org/drawingml/2006/main">
+            <a:pPr>
+              <a:defRPr sz="1650" b="1">
+                <a:solidFill>
+                  <a:schemeClr val="accent4"/>
+                </a:solidFill>
+                <a:latin typeface="+mn-lt"/>
+                <a:ea typeface="+mn-ea"/>
+                <a:cs typeface="+mn-cs"/>
+              </a:defRPr>
+            </a:pPr>
+            <a:r>
+              <a:rPr sz="1650" b="1">
+                <a:solidFill>
+                  <a:schemeClr val="accent4"/>
+                </a:solidFill>
+                <a:latin typeface="+mn-lt"/>
+                <a:ea typeface="+mn-ea"/>
+                <a:cs typeface="+mn-cs"/>
+              </a:rPr>
+              <a:t>結論ラベル</a:t>
+            </a:r>
+          </a:p>
+        </p:txBody>
+      </p:sp>
+      <p:sp>
+        <p:nvSpPr>
+          <p:cNvPr id="8" name="結論本文">
+            <a:extLst xmlns:a="http://schemas.openxmlformats.org/drawingml/2006/main">
+              <a:ext uri="{FF2B5EF4-FFF2-40B4-BE49-F238E27FC236}">
+                <a16:creationId xmlns:a16="http://schemas.microsoft.com/office/drawing/2014/main" id="{B503F108-DBA0-49C4-91F5-7213F21D1417}"/>
+              </a:ext>
+            </a:extLst>
+          </p:cNvPr>
+          <p:cNvSpPr>
+            <a:spLocks xmlns:a="http://schemas.openxmlformats.org/drawingml/2006/main" noGrp="1"/>
+          </p:cNvSpPr>
+          <p:nvPr>
+            <p:ph type="body" idx="81"/>
           </p:nvPr>
         </p:nvSpPr>
         <p:spPr>
           <a:xfrm xmlns:a="http://schemas.openxmlformats.org/drawingml/2006/main">
-            <a:off x="723900" y="5829300"/>
-            <a:ext cx="1809750" cy="361950"/>
+            <a:off x="2647950" y="5657850"/>
+            <a:ext cx="8820150" cy="647700"/>
           </a:xfrm>
           <a:prstGeom xmlns:a="http://schemas.openxmlformats.org/drawingml/2006/main" prst="rect">
             <a:avLst/>
@@ -6137,78 +6034,7 @@
           </a:ln>
         </p:spPr>
         <p:txBody>
-          <a:bodyPr xmlns:a="http://schemas.openxmlformats.org/drawingml/2006/main" wrap="square" lIns="0" tIns="0" rIns="0" bIns="0" anchor="t">
-            <a:noAutofit/>
-          </a:bodyPr>
-          <a:lstStyle xmlns:a="http://schemas.openxmlformats.org/drawingml/2006/main">
-            <a:lvl1pPr>
-              <a:defRPr sz="1650" b="1">
-                <a:solidFill>
-                  <a:schemeClr val="accent4"/>
-                </a:solidFill>
-                <a:latin typeface="+mn-lt"/>
-                <a:ea typeface="+mn-ea"/>
-                <a:cs typeface="+mn-cs"/>
-              </a:defRPr>
-            </a:lvl1pPr>
-          </a:lstStyle>
-          <a:p xmlns:a="http://schemas.openxmlformats.org/drawingml/2006/main">
-            <a:pPr>
-              <a:defRPr sz="1650" b="1">
-                <a:solidFill>
-                  <a:schemeClr val="accent4"/>
-                </a:solidFill>
-                <a:latin typeface="+mn-lt"/>
-                <a:ea typeface="+mn-ea"/>
-                <a:cs typeface="+mn-cs"/>
-              </a:defRPr>
-            </a:pPr>
-            <a:r>
-              <a:rPr sz="1650" b="1">
-                <a:solidFill>
-                  <a:schemeClr val="accent4"/>
-                </a:solidFill>
-                <a:latin typeface="+mn-lt"/>
-                <a:ea typeface="+mn-ea"/>
-                <a:cs typeface="+mn-cs"/>
-              </a:rPr>
-              <a:t>結論ラベル</a:t>
-            </a:r>
-          </a:p>
-        </p:txBody>
-      </p:sp>
-      <p:sp>
-        <p:nvSpPr>
-          <p:cNvPr id="8" name="結論本文">
-            <a:extLst xmlns:a="http://schemas.openxmlformats.org/drawingml/2006/main">
-              <a:ext uri="{FF2B5EF4-FFF2-40B4-BE49-F238E27FC236}">
-                <a16:creationId xmlns:a16="http://schemas.microsoft.com/office/drawing/2014/main" id="{B503F108-DBA0-49C4-91F5-7213F21D1417}"/>
-              </a:ext>
-            </a:extLst>
-          </p:cNvPr>
-          <p:cNvSpPr>
-            <a:spLocks xmlns:a="http://schemas.openxmlformats.org/drawingml/2006/main" noGrp="1"/>
-          </p:cNvSpPr>
-          <p:nvPr>
-            <p:ph type="body" idx="81"/>
-          </p:nvPr>
-        </p:nvSpPr>
-        <p:spPr>
-          <a:xfrm xmlns:a="http://schemas.openxmlformats.org/drawingml/2006/main">
-            <a:off x="2647950" y="5791200"/>
-            <a:ext cx="8820150" cy="457200"/>
-          </a:xfrm>
-          <a:prstGeom xmlns:a="http://schemas.openxmlformats.org/drawingml/2006/main" prst="rect">
-            <a:avLst/>
-          </a:prstGeom>
-          <a:noFill xmlns:a="http://schemas.openxmlformats.org/drawingml/2006/main"/>
-          <a:ln xmlns:a="http://schemas.openxmlformats.org/drawingml/2006/main" w="0">
-            <a:noFill/>
-            <a:prstDash val="solid"/>
-          </a:ln>
-        </p:spPr>
-        <p:txBody>
-          <a:bodyPr xmlns:a="http://schemas.openxmlformats.org/drawingml/2006/main" wrap="square" lIns="0" tIns="0" rIns="0" bIns="0" anchor="t">
+          <a:bodyPr xmlns:a="http://schemas.openxmlformats.org/drawingml/2006/main" wrap="square" lIns="0" tIns="0" rIns="0" bIns="0" anchor="ctr">
             <a:noAutofit/>
           </a:bodyPr>
           <a:lstStyle xmlns:a="http://schemas.openxmlformats.org/drawingml/2006/main">
@@ -6838,17 +6664,19 @@
       </p:sp>
       <p:sp>
         <p:nvSpPr>
-          <p:cNvPr id="11" name="結論帯の背景">
-            <a:extLst xmlns:a="http://schemas.openxmlformats.org/drawingml/2006/main">
-              <a:ext uri="{FF2B5EF4-FFF2-40B4-BE49-F238E27FC236}">
-                <a16:creationId xmlns:a16="http://schemas.microsoft.com/office/drawing/2014/main" id="{65F5DB56-CD2E-4537-8907-5C8B08C7213E}"/>
-              </a:ext>
-            </a:extLst>
-          </p:cNvPr>
-          <p:cNvSpPr>
-            <a:spLocks xmlns:a="http://schemas.openxmlformats.org/drawingml/2006/main" noGrp="1"/>
-          </p:cNvSpPr>
-          <p:nvPr/>
+          <p:cNvPr id="12" name="結論ラベル">
+            <a:extLst xmlns:a="http://schemas.openxmlformats.org/drawingml/2006/main">
+              <a:ext uri="{FF2B5EF4-FFF2-40B4-BE49-F238E27FC236}">
+                <a16:creationId xmlns:a16="http://schemas.microsoft.com/office/drawing/2014/main" id="{FCAF6762-6CFD-4669-9CEF-A7A58D4E6F6E}"/>
+              </a:ext>
+            </a:extLst>
+          </p:cNvPr>
+          <p:cNvSpPr>
+            <a:spLocks xmlns:a="http://schemas.openxmlformats.org/drawingml/2006/main" noGrp="1"/>
+          </p:cNvSpPr>
+          <p:nvPr>
+            <p:ph type="body" idx="80"/>
+          </p:nvPr>
         </p:nvSpPr>
         <p:spPr>
           <a:xfrm xmlns:a="http://schemas.openxmlformats.org/drawingml/2006/main">
@@ -6866,27 +6694,67 @@
             <a:prstDash val="solid"/>
           </a:ln>
         </p:spPr>
-      </p:sp>
-      <p:sp>
-        <p:nvSpPr>
-          <p:cNvPr id="12" name="結論ラベル">
-            <a:extLst xmlns:a="http://schemas.openxmlformats.org/drawingml/2006/main">
-              <a:ext uri="{FF2B5EF4-FFF2-40B4-BE49-F238E27FC236}">
-                <a16:creationId xmlns:a16="http://schemas.microsoft.com/office/drawing/2014/main" id="{FCAF6762-6CFD-4669-9CEF-A7A58D4E6F6E}"/>
-              </a:ext>
-            </a:extLst>
-          </p:cNvPr>
-          <p:cNvSpPr>
-            <a:spLocks xmlns:a="http://schemas.openxmlformats.org/drawingml/2006/main" noGrp="1"/>
-          </p:cNvSpPr>
-          <p:nvPr>
-            <p:ph type="body" idx="80"/>
+        <p:txBody>
+          <a:bodyPr xmlns:a="http://schemas.openxmlformats.org/drawingml/2006/main" wrap="square" lIns="228600" tIns="0" rIns="0" bIns="0" anchor="ctr">
+            <a:noAutofit/>
+          </a:bodyPr>
+          <a:lstStyle xmlns:a="http://schemas.openxmlformats.org/drawingml/2006/main">
+            <a:lvl1pPr>
+              <a:defRPr sz="1650" b="1">
+                <a:solidFill>
+                  <a:schemeClr val="accent2"/>
+                </a:solidFill>
+                <a:latin typeface="+mn-lt"/>
+                <a:ea typeface="+mn-ea"/>
+                <a:cs typeface="+mn-cs"/>
+              </a:defRPr>
+            </a:lvl1pPr>
+          </a:lstStyle>
+          <a:p xmlns:a="http://schemas.openxmlformats.org/drawingml/2006/main">
+            <a:pPr>
+              <a:defRPr sz="1650" b="1">
+                <a:solidFill>
+                  <a:schemeClr val="accent2"/>
+                </a:solidFill>
+                <a:latin typeface="+mn-lt"/>
+                <a:ea typeface="+mn-ea"/>
+                <a:cs typeface="+mn-cs"/>
+              </a:defRPr>
+            </a:pPr>
+            <a:r>
+              <a:rPr sz="1650" b="1">
+                <a:solidFill>
+                  <a:schemeClr val="accent2"/>
+                </a:solidFill>
+                <a:latin typeface="+mn-lt"/>
+                <a:ea typeface="+mn-ea"/>
+                <a:cs typeface="+mn-cs"/>
+              </a:rPr>
+              <a:t>結論ラベル</a:t>
+            </a:r>
+          </a:p>
+        </p:txBody>
+      </p:sp>
+      <p:sp>
+        <p:nvSpPr>
+          <p:cNvPr id="13" name="結論本文">
+            <a:extLst xmlns:a="http://schemas.openxmlformats.org/drawingml/2006/main">
+              <a:ext uri="{FF2B5EF4-FFF2-40B4-BE49-F238E27FC236}">
+                <a16:creationId xmlns:a16="http://schemas.microsoft.com/office/drawing/2014/main" id="{65535C91-8970-4D57-919F-218943C7B0EE}"/>
+              </a:ext>
+            </a:extLst>
+          </p:cNvPr>
+          <p:cNvSpPr>
+            <a:spLocks xmlns:a="http://schemas.openxmlformats.org/drawingml/2006/main" noGrp="1"/>
+          </p:cNvSpPr>
+          <p:nvPr>
+            <p:ph type="body" idx="81"/>
           </p:nvPr>
         </p:nvSpPr>
         <p:spPr>
           <a:xfrm xmlns:a="http://schemas.openxmlformats.org/drawingml/2006/main">
-            <a:off x="723900" y="5829300"/>
-            <a:ext cx="1809750" cy="361950"/>
+            <a:off x="2647950" y="5657850"/>
+            <a:ext cx="8820150" cy="647700"/>
           </a:xfrm>
           <a:prstGeom xmlns:a="http://schemas.openxmlformats.org/drawingml/2006/main" prst="rect">
             <a:avLst/>
@@ -6898,78 +6766,7 @@
           </a:ln>
         </p:spPr>
         <p:txBody>
-          <a:bodyPr xmlns:a="http://schemas.openxmlformats.org/drawingml/2006/main" wrap="square" lIns="0" tIns="0" rIns="0" bIns="0" anchor="t">
-            <a:noAutofit/>
-          </a:bodyPr>
-          <a:lstStyle xmlns:a="http://schemas.openxmlformats.org/drawingml/2006/main">
-            <a:lvl1pPr>
-              <a:defRPr sz="1650" b="1">
-                <a:solidFill>
-                  <a:schemeClr val="accent2"/>
-                </a:solidFill>
-                <a:latin typeface="+mn-lt"/>
-                <a:ea typeface="+mn-ea"/>
-                <a:cs typeface="+mn-cs"/>
-              </a:defRPr>
-            </a:lvl1pPr>
-          </a:lstStyle>
-          <a:p xmlns:a="http://schemas.openxmlformats.org/drawingml/2006/main">
-            <a:pPr>
-              <a:defRPr sz="1650" b="1">
-                <a:solidFill>
-                  <a:schemeClr val="accent2"/>
-                </a:solidFill>
-                <a:latin typeface="+mn-lt"/>
-                <a:ea typeface="+mn-ea"/>
-                <a:cs typeface="+mn-cs"/>
-              </a:defRPr>
-            </a:pPr>
-            <a:r>
-              <a:rPr sz="1650" b="1">
-                <a:solidFill>
-                  <a:schemeClr val="accent2"/>
-                </a:solidFill>
-                <a:latin typeface="+mn-lt"/>
-                <a:ea typeface="+mn-ea"/>
-                <a:cs typeface="+mn-cs"/>
-              </a:rPr>
-              <a:t>結論ラベル</a:t>
-            </a:r>
-          </a:p>
-        </p:txBody>
-      </p:sp>
-      <p:sp>
-        <p:nvSpPr>
-          <p:cNvPr id="13" name="結論本文">
-            <a:extLst xmlns:a="http://schemas.openxmlformats.org/drawingml/2006/main">
-              <a:ext uri="{FF2B5EF4-FFF2-40B4-BE49-F238E27FC236}">
-                <a16:creationId xmlns:a16="http://schemas.microsoft.com/office/drawing/2014/main" id="{65535C91-8970-4D57-919F-218943C7B0EE}"/>
-              </a:ext>
-            </a:extLst>
-          </p:cNvPr>
-          <p:cNvSpPr>
-            <a:spLocks xmlns:a="http://schemas.openxmlformats.org/drawingml/2006/main" noGrp="1"/>
-          </p:cNvSpPr>
-          <p:nvPr>
-            <p:ph type="body" idx="81"/>
-          </p:nvPr>
-        </p:nvSpPr>
-        <p:spPr>
-          <a:xfrm xmlns:a="http://schemas.openxmlformats.org/drawingml/2006/main">
-            <a:off x="2647950" y="5791200"/>
-            <a:ext cx="8820150" cy="457200"/>
-          </a:xfrm>
-          <a:prstGeom xmlns:a="http://schemas.openxmlformats.org/drawingml/2006/main" prst="rect">
-            <a:avLst/>
-          </a:prstGeom>
-          <a:noFill xmlns:a="http://schemas.openxmlformats.org/drawingml/2006/main"/>
-          <a:ln xmlns:a="http://schemas.openxmlformats.org/drawingml/2006/main" w="0">
-            <a:noFill/>
-            <a:prstDash val="solid"/>
-          </a:ln>
-        </p:spPr>
-        <p:txBody>
-          <a:bodyPr xmlns:a="http://schemas.openxmlformats.org/drawingml/2006/main" wrap="square" lIns="0" tIns="0" rIns="0" bIns="0" anchor="t">
+          <a:bodyPr xmlns:a="http://schemas.openxmlformats.org/drawingml/2006/main" wrap="square" lIns="0" tIns="0" rIns="0" bIns="0" anchor="ctr">
             <a:noAutofit/>
           </a:bodyPr>
           <a:lstStyle xmlns:a="http://schemas.openxmlformats.org/drawingml/2006/main">
@@ -7772,17 +7569,19 @@
       </p:sp>
       <p:sp>
         <p:nvSpPr>
-          <p:cNvPr id="14" name="結論帯の背景">
-            <a:extLst xmlns:a="http://schemas.openxmlformats.org/drawingml/2006/main">
-              <a:ext uri="{FF2B5EF4-FFF2-40B4-BE49-F238E27FC236}">
-                <a16:creationId xmlns:a16="http://schemas.microsoft.com/office/drawing/2014/main" id="{038255D3-02FB-4E9E-B11D-256775866A17}"/>
-              </a:ext>
-            </a:extLst>
-          </p:cNvPr>
-          <p:cNvSpPr>
-            <a:spLocks xmlns:a="http://schemas.openxmlformats.org/drawingml/2006/main" noGrp="1"/>
-          </p:cNvSpPr>
-          <p:nvPr/>
+          <p:cNvPr id="15" name="結論ラベル">
+            <a:extLst xmlns:a="http://schemas.openxmlformats.org/drawingml/2006/main">
+              <a:ext uri="{FF2B5EF4-FFF2-40B4-BE49-F238E27FC236}">
+                <a16:creationId xmlns:a16="http://schemas.microsoft.com/office/drawing/2014/main" id="{B0CCF326-DD21-4C95-A388-CA45B98571AB}"/>
+              </a:ext>
+            </a:extLst>
+          </p:cNvPr>
+          <p:cNvSpPr>
+            <a:spLocks xmlns:a="http://schemas.openxmlformats.org/drawingml/2006/main" noGrp="1"/>
+          </p:cNvSpPr>
+          <p:nvPr>
+            <p:ph type="body" idx="80"/>
+          </p:nvPr>
         </p:nvSpPr>
         <p:spPr>
           <a:xfrm xmlns:a="http://schemas.openxmlformats.org/drawingml/2006/main">
@@ -7800,27 +7599,67 @@
             <a:prstDash val="solid"/>
           </a:ln>
         </p:spPr>
-      </p:sp>
-      <p:sp>
-        <p:nvSpPr>
-          <p:cNvPr id="15" name="結論ラベル">
-            <a:extLst xmlns:a="http://schemas.openxmlformats.org/drawingml/2006/main">
-              <a:ext uri="{FF2B5EF4-FFF2-40B4-BE49-F238E27FC236}">
-                <a16:creationId xmlns:a16="http://schemas.microsoft.com/office/drawing/2014/main" id="{B0CCF326-DD21-4C95-A388-CA45B98571AB}"/>
-              </a:ext>
-            </a:extLst>
-          </p:cNvPr>
-          <p:cNvSpPr>
-            <a:spLocks xmlns:a="http://schemas.openxmlformats.org/drawingml/2006/main" noGrp="1"/>
-          </p:cNvSpPr>
-          <p:nvPr>
-            <p:ph type="body" idx="80"/>
+        <p:txBody>
+          <a:bodyPr xmlns:a="http://schemas.openxmlformats.org/drawingml/2006/main" wrap="square" lIns="228600" tIns="0" rIns="0" bIns="0" anchor="ctr">
+            <a:noAutofit/>
+          </a:bodyPr>
+          <a:lstStyle xmlns:a="http://schemas.openxmlformats.org/drawingml/2006/main">
+            <a:lvl1pPr>
+              <a:defRPr sz="1650" b="1">
+                <a:solidFill>
+                  <a:schemeClr val="accent2"/>
+                </a:solidFill>
+                <a:latin typeface="+mn-lt"/>
+                <a:ea typeface="+mn-ea"/>
+                <a:cs typeface="+mn-cs"/>
+              </a:defRPr>
+            </a:lvl1pPr>
+          </a:lstStyle>
+          <a:p xmlns:a="http://schemas.openxmlformats.org/drawingml/2006/main">
+            <a:pPr>
+              <a:defRPr sz="1650" b="1">
+                <a:solidFill>
+                  <a:schemeClr val="accent2"/>
+                </a:solidFill>
+                <a:latin typeface="+mn-lt"/>
+                <a:ea typeface="+mn-ea"/>
+                <a:cs typeface="+mn-cs"/>
+              </a:defRPr>
+            </a:pPr>
+            <a:r>
+              <a:rPr sz="1650" b="1">
+                <a:solidFill>
+                  <a:schemeClr val="accent2"/>
+                </a:solidFill>
+                <a:latin typeface="+mn-lt"/>
+                <a:ea typeface="+mn-ea"/>
+                <a:cs typeface="+mn-cs"/>
+              </a:rPr>
+              <a:t>結論ラベル</a:t>
+            </a:r>
+          </a:p>
+        </p:txBody>
+      </p:sp>
+      <p:sp>
+        <p:nvSpPr>
+          <p:cNvPr id="16" name="結論本文">
+            <a:extLst xmlns:a="http://schemas.openxmlformats.org/drawingml/2006/main">
+              <a:ext uri="{FF2B5EF4-FFF2-40B4-BE49-F238E27FC236}">
+                <a16:creationId xmlns:a16="http://schemas.microsoft.com/office/drawing/2014/main" id="{9BF7F0C1-93EE-4E65-AD62-8803C9E2B64A}"/>
+              </a:ext>
+            </a:extLst>
+          </p:cNvPr>
+          <p:cNvSpPr>
+            <a:spLocks xmlns:a="http://schemas.openxmlformats.org/drawingml/2006/main" noGrp="1"/>
+          </p:cNvSpPr>
+          <p:nvPr>
+            <p:ph type="body" idx="81"/>
           </p:nvPr>
         </p:nvSpPr>
         <p:spPr>
           <a:xfrm xmlns:a="http://schemas.openxmlformats.org/drawingml/2006/main">
-            <a:off x="723900" y="5829300"/>
-            <a:ext cx="1809750" cy="361950"/>
+            <a:off x="2647950" y="5657850"/>
+            <a:ext cx="8820150" cy="647700"/>
           </a:xfrm>
           <a:prstGeom xmlns:a="http://schemas.openxmlformats.org/drawingml/2006/main" prst="rect">
             <a:avLst/>
@@ -7832,78 +7671,7 @@
           </a:ln>
         </p:spPr>
         <p:txBody>
-          <a:bodyPr xmlns:a="http://schemas.openxmlformats.org/drawingml/2006/main" wrap="square" lIns="0" tIns="0" rIns="0" bIns="0" anchor="t">
-            <a:noAutofit/>
-          </a:bodyPr>
-          <a:lstStyle xmlns:a="http://schemas.openxmlformats.org/drawingml/2006/main">
-            <a:lvl1pPr>
-              <a:defRPr sz="1650" b="1">
-                <a:solidFill>
-                  <a:schemeClr val="accent2"/>
-                </a:solidFill>
-                <a:latin typeface="+mn-lt"/>
-                <a:ea typeface="+mn-ea"/>
-                <a:cs typeface="+mn-cs"/>
-              </a:defRPr>
-            </a:lvl1pPr>
-          </a:lstStyle>
-          <a:p xmlns:a="http://schemas.openxmlformats.org/drawingml/2006/main">
-            <a:pPr>
-              <a:defRPr sz="1650" b="1">
-                <a:solidFill>
-                  <a:schemeClr val="accent2"/>
-                </a:solidFill>
-                <a:latin typeface="+mn-lt"/>
-                <a:ea typeface="+mn-ea"/>
-                <a:cs typeface="+mn-cs"/>
-              </a:defRPr>
-            </a:pPr>
-            <a:r>
-              <a:rPr sz="1650" b="1">
-                <a:solidFill>
-                  <a:schemeClr val="accent2"/>
-                </a:solidFill>
-                <a:latin typeface="+mn-lt"/>
-                <a:ea typeface="+mn-ea"/>
-                <a:cs typeface="+mn-cs"/>
-              </a:rPr>
-              <a:t>結論ラベル</a:t>
-            </a:r>
-          </a:p>
-        </p:txBody>
-      </p:sp>
-      <p:sp>
-        <p:nvSpPr>
-          <p:cNvPr id="16" name="結論本文">
-            <a:extLst xmlns:a="http://schemas.openxmlformats.org/drawingml/2006/main">
-              <a:ext uri="{FF2B5EF4-FFF2-40B4-BE49-F238E27FC236}">
-                <a16:creationId xmlns:a16="http://schemas.microsoft.com/office/drawing/2014/main" id="{9BF7F0C1-93EE-4E65-AD62-8803C9E2B64A}"/>
-              </a:ext>
-            </a:extLst>
-          </p:cNvPr>
-          <p:cNvSpPr>
-            <a:spLocks xmlns:a="http://schemas.openxmlformats.org/drawingml/2006/main" noGrp="1"/>
-          </p:cNvSpPr>
-          <p:nvPr>
-            <p:ph type="body" idx="81"/>
-          </p:nvPr>
-        </p:nvSpPr>
-        <p:spPr>
-          <a:xfrm xmlns:a="http://schemas.openxmlformats.org/drawingml/2006/main">
-            <a:off x="2647950" y="5791200"/>
-            <a:ext cx="8820150" cy="457200"/>
-          </a:xfrm>
-          <a:prstGeom xmlns:a="http://schemas.openxmlformats.org/drawingml/2006/main" prst="rect">
-            <a:avLst/>
-          </a:prstGeom>
-          <a:noFill xmlns:a="http://schemas.openxmlformats.org/drawingml/2006/main"/>
-          <a:ln xmlns:a="http://schemas.openxmlformats.org/drawingml/2006/main" w="0">
-            <a:noFill/>
-            <a:prstDash val="solid"/>
-          </a:ln>
-        </p:spPr>
-        <p:txBody>
-          <a:bodyPr xmlns:a="http://schemas.openxmlformats.org/drawingml/2006/main" wrap="square" lIns="0" tIns="0" rIns="0" bIns="0" anchor="t">
+          <a:bodyPr xmlns:a="http://schemas.openxmlformats.org/drawingml/2006/main" wrap="square" lIns="0" tIns="0" rIns="0" bIns="0" anchor="ctr">
             <a:noAutofit/>
           </a:bodyPr>
           <a:lstStyle xmlns:a="http://schemas.openxmlformats.org/drawingml/2006/main">
@@ -9163,17 +8931,19 @@
       </p:sp>
       <p:sp>
         <p:nvSpPr>
-          <p:cNvPr id="21" name="結論帯の背景">
-            <a:extLst xmlns:a="http://schemas.openxmlformats.org/drawingml/2006/main">
-              <a:ext uri="{FF2B5EF4-FFF2-40B4-BE49-F238E27FC236}">
-                <a16:creationId xmlns:a16="http://schemas.microsoft.com/office/drawing/2014/main" id="{28B1F1CA-ADFD-45D4-9F25-E3D115606CEC}"/>
-              </a:ext>
-            </a:extLst>
-          </p:cNvPr>
-          <p:cNvSpPr>
-            <a:spLocks xmlns:a="http://schemas.openxmlformats.org/drawingml/2006/main" noGrp="1"/>
-          </p:cNvSpPr>
-          <p:nvPr/>
+          <p:cNvPr id="22" name="結論ラベル">
+            <a:extLst xmlns:a="http://schemas.openxmlformats.org/drawingml/2006/main">
+              <a:ext uri="{FF2B5EF4-FFF2-40B4-BE49-F238E27FC236}">
+                <a16:creationId xmlns:a16="http://schemas.microsoft.com/office/drawing/2014/main" id="{520A9EB8-8D07-4C38-9C06-194230CA2171}"/>
+              </a:ext>
+            </a:extLst>
+          </p:cNvPr>
+          <p:cNvSpPr>
+            <a:spLocks xmlns:a="http://schemas.openxmlformats.org/drawingml/2006/main" noGrp="1"/>
+          </p:cNvSpPr>
+          <p:nvPr>
+            <p:ph type="body" idx="80"/>
+          </p:nvPr>
         </p:nvSpPr>
         <p:spPr>
           <a:xfrm xmlns:a="http://schemas.openxmlformats.org/drawingml/2006/main">
@@ -9191,27 +8961,67 @@
             <a:prstDash val="solid"/>
           </a:ln>
         </p:spPr>
-      </p:sp>
-      <p:sp>
-        <p:nvSpPr>
-          <p:cNvPr id="22" name="結論ラベル">
-            <a:extLst xmlns:a="http://schemas.openxmlformats.org/drawingml/2006/main">
-              <a:ext uri="{FF2B5EF4-FFF2-40B4-BE49-F238E27FC236}">
-                <a16:creationId xmlns:a16="http://schemas.microsoft.com/office/drawing/2014/main" id="{520A9EB8-8D07-4C38-9C06-194230CA2171}"/>
-              </a:ext>
-            </a:extLst>
-          </p:cNvPr>
-          <p:cNvSpPr>
-            <a:spLocks xmlns:a="http://schemas.openxmlformats.org/drawingml/2006/main" noGrp="1"/>
-          </p:cNvSpPr>
-          <p:nvPr>
-            <p:ph type="body" idx="80"/>
+        <p:txBody>
+          <a:bodyPr xmlns:a="http://schemas.openxmlformats.org/drawingml/2006/main" wrap="square" lIns="228600" tIns="0" rIns="0" bIns="0" anchor="ctr">
+            <a:noAutofit/>
+          </a:bodyPr>
+          <a:lstStyle xmlns:a="http://schemas.openxmlformats.org/drawingml/2006/main">
+            <a:lvl1pPr>
+              <a:defRPr sz="1650" b="1">
+                <a:solidFill>
+                  <a:schemeClr val="accent4"/>
+                </a:solidFill>
+                <a:latin typeface="+mn-lt"/>
+                <a:ea typeface="+mn-ea"/>
+                <a:cs typeface="+mn-cs"/>
+              </a:defRPr>
+            </a:lvl1pPr>
+          </a:lstStyle>
+          <a:p xmlns:a="http://schemas.openxmlformats.org/drawingml/2006/main">
+            <a:pPr>
+              <a:defRPr sz="1650" b="1">
+                <a:solidFill>
+                  <a:schemeClr val="accent4"/>
+                </a:solidFill>
+                <a:latin typeface="+mn-lt"/>
+                <a:ea typeface="+mn-ea"/>
+                <a:cs typeface="+mn-cs"/>
+              </a:defRPr>
+            </a:pPr>
+            <a:r>
+              <a:rPr sz="1650" b="1">
+                <a:solidFill>
+                  <a:schemeClr val="accent4"/>
+                </a:solidFill>
+                <a:latin typeface="+mn-lt"/>
+                <a:ea typeface="+mn-ea"/>
+                <a:cs typeface="+mn-cs"/>
+              </a:rPr>
+              <a:t>結論ラベル</a:t>
+            </a:r>
+          </a:p>
+        </p:txBody>
+      </p:sp>
+      <p:sp>
+        <p:nvSpPr>
+          <p:cNvPr id="23" name="結論本文">
+            <a:extLst xmlns:a="http://schemas.openxmlformats.org/drawingml/2006/main">
+              <a:ext uri="{FF2B5EF4-FFF2-40B4-BE49-F238E27FC236}">
+                <a16:creationId xmlns:a16="http://schemas.microsoft.com/office/drawing/2014/main" id="{E246494B-5CF6-498D-A9F1-81C9A014FA55}"/>
+              </a:ext>
+            </a:extLst>
+          </p:cNvPr>
+          <p:cNvSpPr>
+            <a:spLocks xmlns:a="http://schemas.openxmlformats.org/drawingml/2006/main" noGrp="1"/>
+          </p:cNvSpPr>
+          <p:nvPr>
+            <p:ph type="body" idx="81"/>
           </p:nvPr>
         </p:nvSpPr>
         <p:spPr>
           <a:xfrm xmlns:a="http://schemas.openxmlformats.org/drawingml/2006/main">
-            <a:off x="723900" y="5829300"/>
-            <a:ext cx="1809750" cy="361950"/>
+            <a:off x="2647950" y="5657850"/>
+            <a:ext cx="8820150" cy="647700"/>
           </a:xfrm>
           <a:prstGeom xmlns:a="http://schemas.openxmlformats.org/drawingml/2006/main" prst="rect">
             <a:avLst/>
@@ -9223,78 +9033,7 @@
           </a:ln>
         </p:spPr>
         <p:txBody>
-          <a:bodyPr xmlns:a="http://schemas.openxmlformats.org/drawingml/2006/main" wrap="square" lIns="0" tIns="0" rIns="0" bIns="0" anchor="t">
-            <a:noAutofit/>
-          </a:bodyPr>
-          <a:lstStyle xmlns:a="http://schemas.openxmlformats.org/drawingml/2006/main">
-            <a:lvl1pPr>
-              <a:defRPr sz="1650" b="1">
-                <a:solidFill>
-                  <a:schemeClr val="accent4"/>
-                </a:solidFill>
-                <a:latin typeface="+mn-lt"/>
-                <a:ea typeface="+mn-ea"/>
-                <a:cs typeface="+mn-cs"/>
-              </a:defRPr>
-            </a:lvl1pPr>
-          </a:lstStyle>
-          <a:p xmlns:a="http://schemas.openxmlformats.org/drawingml/2006/main">
-            <a:pPr>
-              <a:defRPr sz="1650" b="1">
-                <a:solidFill>
-                  <a:schemeClr val="accent4"/>
-                </a:solidFill>
-                <a:latin typeface="+mn-lt"/>
-                <a:ea typeface="+mn-ea"/>
-                <a:cs typeface="+mn-cs"/>
-              </a:defRPr>
-            </a:pPr>
-            <a:r>
-              <a:rPr sz="1650" b="1">
-                <a:solidFill>
-                  <a:schemeClr val="accent4"/>
-                </a:solidFill>
-                <a:latin typeface="+mn-lt"/>
-                <a:ea typeface="+mn-ea"/>
-                <a:cs typeface="+mn-cs"/>
-              </a:rPr>
-              <a:t>結論ラベル</a:t>
-            </a:r>
-          </a:p>
-        </p:txBody>
-      </p:sp>
-      <p:sp>
-        <p:nvSpPr>
-          <p:cNvPr id="23" name="結論本文">
-            <a:extLst xmlns:a="http://schemas.openxmlformats.org/drawingml/2006/main">
-              <a:ext uri="{FF2B5EF4-FFF2-40B4-BE49-F238E27FC236}">
-                <a16:creationId xmlns:a16="http://schemas.microsoft.com/office/drawing/2014/main" id="{E246494B-5CF6-498D-A9F1-81C9A014FA55}"/>
-              </a:ext>
-            </a:extLst>
-          </p:cNvPr>
-          <p:cNvSpPr>
-            <a:spLocks xmlns:a="http://schemas.openxmlformats.org/drawingml/2006/main" noGrp="1"/>
-          </p:cNvSpPr>
-          <p:nvPr>
-            <p:ph type="body" idx="81"/>
-          </p:nvPr>
-        </p:nvSpPr>
-        <p:spPr>
-          <a:xfrm xmlns:a="http://schemas.openxmlformats.org/drawingml/2006/main">
-            <a:off x="2647950" y="5791200"/>
-            <a:ext cx="8820150" cy="457200"/>
-          </a:xfrm>
-          <a:prstGeom xmlns:a="http://schemas.openxmlformats.org/drawingml/2006/main" prst="rect">
-            <a:avLst/>
-          </a:prstGeom>
-          <a:noFill xmlns:a="http://schemas.openxmlformats.org/drawingml/2006/main"/>
-          <a:ln xmlns:a="http://schemas.openxmlformats.org/drawingml/2006/main" w="0">
-            <a:noFill/>
-            <a:prstDash val="solid"/>
-          </a:ln>
-        </p:spPr>
-        <p:txBody>
-          <a:bodyPr xmlns:a="http://schemas.openxmlformats.org/drawingml/2006/main" wrap="square" lIns="0" tIns="0" rIns="0" bIns="0" anchor="t">
+          <a:bodyPr xmlns:a="http://schemas.openxmlformats.org/drawingml/2006/main" wrap="square" lIns="0" tIns="0" rIns="0" bIns="0" anchor="ctr">
             <a:noAutofit/>
           </a:bodyPr>
           <a:lstStyle xmlns:a="http://schemas.openxmlformats.org/drawingml/2006/main">
@@ -9649,17 +9388,19 @@
       </p:sp>
       <p:sp>
         <p:nvSpPr>
-          <p:cNvPr id="6" name="結論帯の背景">
-            <a:extLst xmlns:a="http://schemas.openxmlformats.org/drawingml/2006/main">
-              <a:ext uri="{FF2B5EF4-FFF2-40B4-BE49-F238E27FC236}">
-                <a16:creationId xmlns:a16="http://schemas.microsoft.com/office/drawing/2014/main" id="{9C367E46-3FA5-4B9B-82A4-62E708B658DA}"/>
-              </a:ext>
-            </a:extLst>
-          </p:cNvPr>
-          <p:cNvSpPr>
-            <a:spLocks xmlns:a="http://schemas.openxmlformats.org/drawingml/2006/main" noGrp="1"/>
-          </p:cNvSpPr>
-          <p:nvPr/>
+          <p:cNvPr id="7" name="結論ラベル">
+            <a:extLst xmlns:a="http://schemas.openxmlformats.org/drawingml/2006/main">
+              <a:ext uri="{FF2B5EF4-FFF2-40B4-BE49-F238E27FC236}">
+                <a16:creationId xmlns:a16="http://schemas.microsoft.com/office/drawing/2014/main" id="{A6057F4C-2C15-4442-AFC4-690B6C7DADF9}"/>
+              </a:ext>
+            </a:extLst>
+          </p:cNvPr>
+          <p:cNvSpPr>
+            <a:spLocks xmlns:a="http://schemas.openxmlformats.org/drawingml/2006/main" noGrp="1"/>
+          </p:cNvSpPr>
+          <p:nvPr>
+            <p:ph type="body" idx="80"/>
+          </p:nvPr>
         </p:nvSpPr>
         <p:spPr>
           <a:xfrm xmlns:a="http://schemas.openxmlformats.org/drawingml/2006/main">
@@ -9677,27 +9418,67 @@
             <a:prstDash val="solid"/>
           </a:ln>
         </p:spPr>
-      </p:sp>
-      <p:sp>
-        <p:nvSpPr>
-          <p:cNvPr id="7" name="結論ラベル">
-            <a:extLst xmlns:a="http://schemas.openxmlformats.org/drawingml/2006/main">
-              <a:ext uri="{FF2B5EF4-FFF2-40B4-BE49-F238E27FC236}">
-                <a16:creationId xmlns:a16="http://schemas.microsoft.com/office/drawing/2014/main" id="{A6057F4C-2C15-4442-AFC4-690B6C7DADF9}"/>
-              </a:ext>
-            </a:extLst>
-          </p:cNvPr>
-          <p:cNvSpPr>
-            <a:spLocks xmlns:a="http://schemas.openxmlformats.org/drawingml/2006/main" noGrp="1"/>
-          </p:cNvSpPr>
-          <p:nvPr>
-            <p:ph type="body" idx="80"/>
+        <p:txBody>
+          <a:bodyPr xmlns:a="http://schemas.openxmlformats.org/drawingml/2006/main" wrap="square" lIns="228600" tIns="0" rIns="0" bIns="0" anchor="ctr">
+            <a:noAutofit/>
+          </a:bodyPr>
+          <a:lstStyle xmlns:a="http://schemas.openxmlformats.org/drawingml/2006/main">
+            <a:lvl1pPr>
+              <a:defRPr sz="1650" b="1">
+                <a:solidFill>
+                  <a:schemeClr val="accent2"/>
+                </a:solidFill>
+                <a:latin typeface="+mn-lt"/>
+                <a:ea typeface="+mn-ea"/>
+                <a:cs typeface="+mn-cs"/>
+              </a:defRPr>
+            </a:lvl1pPr>
+          </a:lstStyle>
+          <a:p xmlns:a="http://schemas.openxmlformats.org/drawingml/2006/main">
+            <a:pPr>
+              <a:defRPr sz="1650" b="1">
+                <a:solidFill>
+                  <a:schemeClr val="accent2"/>
+                </a:solidFill>
+                <a:latin typeface="+mn-lt"/>
+                <a:ea typeface="+mn-ea"/>
+                <a:cs typeface="+mn-cs"/>
+              </a:defRPr>
+            </a:pPr>
+            <a:r>
+              <a:rPr sz="1650" b="1">
+                <a:solidFill>
+                  <a:schemeClr val="accent2"/>
+                </a:solidFill>
+                <a:latin typeface="+mn-lt"/>
+                <a:ea typeface="+mn-ea"/>
+                <a:cs typeface="+mn-cs"/>
+              </a:rPr>
+              <a:t>結論ラベル</a:t>
+            </a:r>
+          </a:p>
+        </p:txBody>
+      </p:sp>
+      <p:sp>
+        <p:nvSpPr>
+          <p:cNvPr id="8" name="結論本文">
+            <a:extLst xmlns:a="http://schemas.openxmlformats.org/drawingml/2006/main">
+              <a:ext uri="{FF2B5EF4-FFF2-40B4-BE49-F238E27FC236}">
+                <a16:creationId xmlns:a16="http://schemas.microsoft.com/office/drawing/2014/main" id="{B71952AF-AF9C-42BB-B667-BD0B065ABF5E}"/>
+              </a:ext>
+            </a:extLst>
+          </p:cNvPr>
+          <p:cNvSpPr>
+            <a:spLocks xmlns:a="http://schemas.openxmlformats.org/drawingml/2006/main" noGrp="1"/>
+          </p:cNvSpPr>
+          <p:nvPr>
+            <p:ph type="body" idx="81"/>
           </p:nvPr>
         </p:nvSpPr>
         <p:spPr>
           <a:xfrm xmlns:a="http://schemas.openxmlformats.org/drawingml/2006/main">
-            <a:off x="723900" y="5829300"/>
-            <a:ext cx="1809750" cy="361950"/>
+            <a:off x="2647950" y="5657850"/>
+            <a:ext cx="8820150" cy="647700"/>
           </a:xfrm>
           <a:prstGeom xmlns:a="http://schemas.openxmlformats.org/drawingml/2006/main" prst="rect">
             <a:avLst/>
@@ -9709,78 +9490,7 @@
           </a:ln>
         </p:spPr>
         <p:txBody>
-          <a:bodyPr xmlns:a="http://schemas.openxmlformats.org/drawingml/2006/main" wrap="square" lIns="0" tIns="0" rIns="0" bIns="0" anchor="t">
-            <a:noAutofit/>
-          </a:bodyPr>
-          <a:lstStyle xmlns:a="http://schemas.openxmlformats.org/drawingml/2006/main">
-            <a:lvl1pPr>
-              <a:defRPr sz="1650" b="1">
-                <a:solidFill>
-                  <a:schemeClr val="accent2"/>
-                </a:solidFill>
-                <a:latin typeface="+mn-lt"/>
-                <a:ea typeface="+mn-ea"/>
-                <a:cs typeface="+mn-cs"/>
-              </a:defRPr>
-            </a:lvl1pPr>
-          </a:lstStyle>
-          <a:p xmlns:a="http://schemas.openxmlformats.org/drawingml/2006/main">
-            <a:pPr>
-              <a:defRPr sz="1650" b="1">
-                <a:solidFill>
-                  <a:schemeClr val="accent2"/>
-                </a:solidFill>
-                <a:latin typeface="+mn-lt"/>
-                <a:ea typeface="+mn-ea"/>
-                <a:cs typeface="+mn-cs"/>
-              </a:defRPr>
-            </a:pPr>
-            <a:r>
-              <a:rPr sz="1650" b="1">
-                <a:solidFill>
-                  <a:schemeClr val="accent2"/>
-                </a:solidFill>
-                <a:latin typeface="+mn-lt"/>
-                <a:ea typeface="+mn-ea"/>
-                <a:cs typeface="+mn-cs"/>
-              </a:rPr>
-              <a:t>結論ラベル</a:t>
-            </a:r>
-          </a:p>
-        </p:txBody>
-      </p:sp>
-      <p:sp>
-        <p:nvSpPr>
-          <p:cNvPr id="8" name="結論本文">
-            <a:extLst xmlns:a="http://schemas.openxmlformats.org/drawingml/2006/main">
-              <a:ext uri="{FF2B5EF4-FFF2-40B4-BE49-F238E27FC236}">
-                <a16:creationId xmlns:a16="http://schemas.microsoft.com/office/drawing/2014/main" id="{B71952AF-AF9C-42BB-B667-BD0B065ABF5E}"/>
-              </a:ext>
-            </a:extLst>
-          </p:cNvPr>
-          <p:cNvSpPr>
-            <a:spLocks xmlns:a="http://schemas.openxmlformats.org/drawingml/2006/main" noGrp="1"/>
-          </p:cNvSpPr>
-          <p:nvPr>
-            <p:ph type="body" idx="81"/>
-          </p:nvPr>
-        </p:nvSpPr>
-        <p:spPr>
-          <a:xfrm xmlns:a="http://schemas.openxmlformats.org/drawingml/2006/main">
-            <a:off x="2647950" y="5791200"/>
-            <a:ext cx="8820150" cy="457200"/>
-          </a:xfrm>
-          <a:prstGeom xmlns:a="http://schemas.openxmlformats.org/drawingml/2006/main" prst="rect">
-            <a:avLst/>
-          </a:prstGeom>
-          <a:noFill xmlns:a="http://schemas.openxmlformats.org/drawingml/2006/main"/>
-          <a:ln xmlns:a="http://schemas.openxmlformats.org/drawingml/2006/main" w="0">
-            <a:noFill/>
-            <a:prstDash val="solid"/>
-          </a:ln>
-        </p:spPr>
-        <p:txBody>
-          <a:bodyPr xmlns:a="http://schemas.openxmlformats.org/drawingml/2006/main" wrap="square" lIns="0" tIns="0" rIns="0" bIns="0" anchor="t">
+          <a:bodyPr xmlns:a="http://schemas.openxmlformats.org/drawingml/2006/main" wrap="square" lIns="0" tIns="0" rIns="0" bIns="0" anchor="ctr">
             <a:noAutofit/>
           </a:bodyPr>
           <a:lstStyle xmlns:a="http://schemas.openxmlformats.org/drawingml/2006/main">
@@ -10827,17 +10537,19 @@
       </p:sp>
       <p:sp>
         <p:nvSpPr>
-          <p:cNvPr id="18" name="結論帯の背景">
-            <a:extLst xmlns:a="http://schemas.openxmlformats.org/drawingml/2006/main">
-              <a:ext uri="{FF2B5EF4-FFF2-40B4-BE49-F238E27FC236}">
-                <a16:creationId xmlns:a16="http://schemas.microsoft.com/office/drawing/2014/main" id="{879A5E21-D8C2-4624-8132-40A6BDD71D93}"/>
-              </a:ext>
-            </a:extLst>
-          </p:cNvPr>
-          <p:cNvSpPr>
-            <a:spLocks xmlns:a="http://schemas.openxmlformats.org/drawingml/2006/main" noGrp="1"/>
-          </p:cNvSpPr>
-          <p:nvPr/>
+          <p:cNvPr id="19" name="結論ラベル">
+            <a:extLst xmlns:a="http://schemas.openxmlformats.org/drawingml/2006/main">
+              <a:ext uri="{FF2B5EF4-FFF2-40B4-BE49-F238E27FC236}">
+                <a16:creationId xmlns:a16="http://schemas.microsoft.com/office/drawing/2014/main" id="{E8A2ACD3-AA1B-4B4D-AC9D-4BFB04DE3ECC}"/>
+              </a:ext>
+            </a:extLst>
+          </p:cNvPr>
+          <p:cNvSpPr>
+            <a:spLocks xmlns:a="http://schemas.openxmlformats.org/drawingml/2006/main" noGrp="1"/>
+          </p:cNvSpPr>
+          <p:nvPr>
+            <p:ph type="body" idx="80"/>
+          </p:nvPr>
         </p:nvSpPr>
         <p:spPr>
           <a:xfrm xmlns:a="http://schemas.openxmlformats.org/drawingml/2006/main">
@@ -10855,27 +10567,67 @@
             <a:prstDash val="solid"/>
           </a:ln>
         </p:spPr>
-      </p:sp>
-      <p:sp>
-        <p:nvSpPr>
-          <p:cNvPr id="19" name="結論ラベル">
-            <a:extLst xmlns:a="http://schemas.openxmlformats.org/drawingml/2006/main">
-              <a:ext uri="{FF2B5EF4-FFF2-40B4-BE49-F238E27FC236}">
-                <a16:creationId xmlns:a16="http://schemas.microsoft.com/office/drawing/2014/main" id="{E8A2ACD3-AA1B-4B4D-AC9D-4BFB04DE3ECC}"/>
-              </a:ext>
-            </a:extLst>
-          </p:cNvPr>
-          <p:cNvSpPr>
-            <a:spLocks xmlns:a="http://schemas.openxmlformats.org/drawingml/2006/main" noGrp="1"/>
-          </p:cNvSpPr>
-          <p:nvPr>
-            <p:ph type="body" idx="80"/>
+        <p:txBody>
+          <a:bodyPr xmlns:a="http://schemas.openxmlformats.org/drawingml/2006/main" wrap="square" lIns="228600" tIns="0" rIns="0" bIns="0" anchor="ctr">
+            <a:noAutofit/>
+          </a:bodyPr>
+          <a:lstStyle xmlns:a="http://schemas.openxmlformats.org/drawingml/2006/main">
+            <a:lvl1pPr>
+              <a:defRPr sz="1650" b="1">
+                <a:solidFill>
+                  <a:schemeClr val="accent2"/>
+                </a:solidFill>
+                <a:latin typeface="+mn-lt"/>
+                <a:ea typeface="+mn-ea"/>
+                <a:cs typeface="+mn-cs"/>
+              </a:defRPr>
+            </a:lvl1pPr>
+          </a:lstStyle>
+          <a:p xmlns:a="http://schemas.openxmlformats.org/drawingml/2006/main">
+            <a:pPr>
+              <a:defRPr sz="1650" b="1">
+                <a:solidFill>
+                  <a:schemeClr val="accent2"/>
+                </a:solidFill>
+                <a:latin typeface="+mn-lt"/>
+                <a:ea typeface="+mn-ea"/>
+                <a:cs typeface="+mn-cs"/>
+              </a:defRPr>
+            </a:pPr>
+            <a:r>
+              <a:rPr sz="1650" b="1">
+                <a:solidFill>
+                  <a:schemeClr val="accent2"/>
+                </a:solidFill>
+                <a:latin typeface="+mn-lt"/>
+                <a:ea typeface="+mn-ea"/>
+                <a:cs typeface="+mn-cs"/>
+              </a:rPr>
+              <a:t>結論ラベル</a:t>
+            </a:r>
+          </a:p>
+        </p:txBody>
+      </p:sp>
+      <p:sp>
+        <p:nvSpPr>
+          <p:cNvPr id="20" name="結論本文">
+            <a:extLst xmlns:a="http://schemas.openxmlformats.org/drawingml/2006/main">
+              <a:ext uri="{FF2B5EF4-FFF2-40B4-BE49-F238E27FC236}">
+                <a16:creationId xmlns:a16="http://schemas.microsoft.com/office/drawing/2014/main" id="{8E4905B7-8A6B-45C7-876C-780DE637D330}"/>
+              </a:ext>
+            </a:extLst>
+          </p:cNvPr>
+          <p:cNvSpPr>
+            <a:spLocks xmlns:a="http://schemas.openxmlformats.org/drawingml/2006/main" noGrp="1"/>
+          </p:cNvSpPr>
+          <p:nvPr>
+            <p:ph type="body" idx="81"/>
           </p:nvPr>
         </p:nvSpPr>
         <p:spPr>
           <a:xfrm xmlns:a="http://schemas.openxmlformats.org/drawingml/2006/main">
-            <a:off x="723900" y="5829300"/>
-            <a:ext cx="1809750" cy="361950"/>
+            <a:off x="2647950" y="5657850"/>
+            <a:ext cx="8820150" cy="647700"/>
           </a:xfrm>
           <a:prstGeom xmlns:a="http://schemas.openxmlformats.org/drawingml/2006/main" prst="rect">
             <a:avLst/>
@@ -10887,78 +10639,7 @@
           </a:ln>
         </p:spPr>
         <p:txBody>
-          <a:bodyPr xmlns:a="http://schemas.openxmlformats.org/drawingml/2006/main" wrap="square" lIns="0" tIns="0" rIns="0" bIns="0" anchor="t">
-            <a:noAutofit/>
-          </a:bodyPr>
-          <a:lstStyle xmlns:a="http://schemas.openxmlformats.org/drawingml/2006/main">
-            <a:lvl1pPr>
-              <a:defRPr sz="1650" b="1">
-                <a:solidFill>
-                  <a:schemeClr val="accent2"/>
-                </a:solidFill>
-                <a:latin typeface="+mn-lt"/>
-                <a:ea typeface="+mn-ea"/>
-                <a:cs typeface="+mn-cs"/>
-              </a:defRPr>
-            </a:lvl1pPr>
-          </a:lstStyle>
-          <a:p xmlns:a="http://schemas.openxmlformats.org/drawingml/2006/main">
-            <a:pPr>
-              <a:defRPr sz="1650" b="1">
-                <a:solidFill>
-                  <a:schemeClr val="accent2"/>
-                </a:solidFill>
-                <a:latin typeface="+mn-lt"/>
-                <a:ea typeface="+mn-ea"/>
-                <a:cs typeface="+mn-cs"/>
-              </a:defRPr>
-            </a:pPr>
-            <a:r>
-              <a:rPr sz="1650" b="1">
-                <a:solidFill>
-                  <a:schemeClr val="accent2"/>
-                </a:solidFill>
-                <a:latin typeface="+mn-lt"/>
-                <a:ea typeface="+mn-ea"/>
-                <a:cs typeface="+mn-cs"/>
-              </a:rPr>
-              <a:t>結論ラベル</a:t>
-            </a:r>
-          </a:p>
-        </p:txBody>
-      </p:sp>
-      <p:sp>
-        <p:nvSpPr>
-          <p:cNvPr id="20" name="結論本文">
-            <a:extLst xmlns:a="http://schemas.openxmlformats.org/drawingml/2006/main">
-              <a:ext uri="{FF2B5EF4-FFF2-40B4-BE49-F238E27FC236}">
-                <a16:creationId xmlns:a16="http://schemas.microsoft.com/office/drawing/2014/main" id="{8E4905B7-8A6B-45C7-876C-780DE637D330}"/>
-              </a:ext>
-            </a:extLst>
-          </p:cNvPr>
-          <p:cNvSpPr>
-            <a:spLocks xmlns:a="http://schemas.openxmlformats.org/drawingml/2006/main" noGrp="1"/>
-          </p:cNvSpPr>
-          <p:nvPr>
-            <p:ph type="body" idx="81"/>
-          </p:nvPr>
-        </p:nvSpPr>
-        <p:spPr>
-          <a:xfrm xmlns:a="http://schemas.openxmlformats.org/drawingml/2006/main">
-            <a:off x="2647950" y="5791200"/>
-            <a:ext cx="8820150" cy="457200"/>
-          </a:xfrm>
-          <a:prstGeom xmlns:a="http://schemas.openxmlformats.org/drawingml/2006/main" prst="rect">
-            <a:avLst/>
-          </a:prstGeom>
-          <a:noFill xmlns:a="http://schemas.openxmlformats.org/drawingml/2006/main"/>
-          <a:ln xmlns:a="http://schemas.openxmlformats.org/drawingml/2006/main" w="0">
-            <a:noFill/>
-            <a:prstDash val="solid"/>
-          </a:ln>
-        </p:spPr>
-        <p:txBody>
-          <a:bodyPr xmlns:a="http://schemas.openxmlformats.org/drawingml/2006/main" wrap="square" lIns="0" tIns="0" rIns="0" bIns="0" anchor="t">
+          <a:bodyPr xmlns:a="http://schemas.openxmlformats.org/drawingml/2006/main" wrap="square" lIns="0" tIns="0" rIns="0" bIns="0" anchor="ctr">
             <a:noAutofit/>
           </a:bodyPr>
           <a:lstStyle xmlns:a="http://schemas.openxmlformats.org/drawingml/2006/main">
@@ -12161,17 +11842,19 @@
       </p:sp>
       <p:sp>
         <p:nvSpPr>
-          <p:cNvPr id="20" name="結論帯の背景">
-            <a:extLst xmlns:a="http://schemas.openxmlformats.org/drawingml/2006/main">
-              <a:ext uri="{FF2B5EF4-FFF2-40B4-BE49-F238E27FC236}">
-                <a16:creationId xmlns:a16="http://schemas.microsoft.com/office/drawing/2014/main" id="{F37C57D0-5DBA-4035-A8A9-FDF958B5E626}"/>
-              </a:ext>
-            </a:extLst>
-          </p:cNvPr>
-          <p:cNvSpPr>
-            <a:spLocks xmlns:a="http://schemas.openxmlformats.org/drawingml/2006/main" noGrp="1"/>
-          </p:cNvSpPr>
-          <p:nvPr/>
+          <p:cNvPr id="21" name="結論ラベル">
+            <a:extLst xmlns:a="http://schemas.openxmlformats.org/drawingml/2006/main">
+              <a:ext uri="{FF2B5EF4-FFF2-40B4-BE49-F238E27FC236}">
+                <a16:creationId xmlns:a16="http://schemas.microsoft.com/office/drawing/2014/main" id="{726F992E-79E1-4031-9969-1A4BCF697A8B}"/>
+              </a:ext>
+            </a:extLst>
+          </p:cNvPr>
+          <p:cNvSpPr>
+            <a:spLocks xmlns:a="http://schemas.openxmlformats.org/drawingml/2006/main" noGrp="1"/>
+          </p:cNvSpPr>
+          <p:nvPr>
+            <p:ph type="body" idx="80"/>
+          </p:nvPr>
         </p:nvSpPr>
         <p:spPr>
           <a:xfrm xmlns:a="http://schemas.openxmlformats.org/drawingml/2006/main">
@@ -12189,27 +11872,67 @@
             <a:prstDash val="solid"/>
           </a:ln>
         </p:spPr>
-      </p:sp>
-      <p:sp>
-        <p:nvSpPr>
-          <p:cNvPr id="21" name="結論ラベル">
-            <a:extLst xmlns:a="http://schemas.openxmlformats.org/drawingml/2006/main">
-              <a:ext uri="{FF2B5EF4-FFF2-40B4-BE49-F238E27FC236}">
-                <a16:creationId xmlns:a16="http://schemas.microsoft.com/office/drawing/2014/main" id="{726F992E-79E1-4031-9969-1A4BCF697A8B}"/>
-              </a:ext>
-            </a:extLst>
-          </p:cNvPr>
-          <p:cNvSpPr>
-            <a:spLocks xmlns:a="http://schemas.openxmlformats.org/drawingml/2006/main" noGrp="1"/>
-          </p:cNvSpPr>
-          <p:nvPr>
-            <p:ph type="body" idx="80"/>
+        <p:txBody>
+          <a:bodyPr xmlns:a="http://schemas.openxmlformats.org/drawingml/2006/main" wrap="square" lIns="228600" tIns="0" rIns="0" bIns="0" anchor="ctr">
+            <a:noAutofit/>
+          </a:bodyPr>
+          <a:lstStyle xmlns:a="http://schemas.openxmlformats.org/drawingml/2006/main">
+            <a:lvl1pPr>
+              <a:defRPr sz="1650" b="1">
+                <a:solidFill>
+                  <a:schemeClr val="accent2"/>
+                </a:solidFill>
+                <a:latin typeface="+mn-lt"/>
+                <a:ea typeface="+mn-ea"/>
+                <a:cs typeface="+mn-cs"/>
+              </a:defRPr>
+            </a:lvl1pPr>
+          </a:lstStyle>
+          <a:p xmlns:a="http://schemas.openxmlformats.org/drawingml/2006/main">
+            <a:pPr>
+              <a:defRPr sz="1650" b="1">
+                <a:solidFill>
+                  <a:schemeClr val="accent2"/>
+                </a:solidFill>
+                <a:latin typeface="+mn-lt"/>
+                <a:ea typeface="+mn-ea"/>
+                <a:cs typeface="+mn-cs"/>
+              </a:defRPr>
+            </a:pPr>
+            <a:r>
+              <a:rPr sz="1650" b="1">
+                <a:solidFill>
+                  <a:schemeClr val="accent2"/>
+                </a:solidFill>
+                <a:latin typeface="+mn-lt"/>
+                <a:ea typeface="+mn-ea"/>
+                <a:cs typeface="+mn-cs"/>
+              </a:rPr>
+              <a:t>結論ラベル</a:t>
+            </a:r>
+          </a:p>
+        </p:txBody>
+      </p:sp>
+      <p:sp>
+        <p:nvSpPr>
+          <p:cNvPr id="22" name="結論本文">
+            <a:extLst xmlns:a="http://schemas.openxmlformats.org/drawingml/2006/main">
+              <a:ext uri="{FF2B5EF4-FFF2-40B4-BE49-F238E27FC236}">
+                <a16:creationId xmlns:a16="http://schemas.microsoft.com/office/drawing/2014/main" id="{3756C9A1-6D79-4DE1-9777-32799F5B8CC7}"/>
+              </a:ext>
+            </a:extLst>
+          </p:cNvPr>
+          <p:cNvSpPr>
+            <a:spLocks xmlns:a="http://schemas.openxmlformats.org/drawingml/2006/main" noGrp="1"/>
+          </p:cNvSpPr>
+          <p:nvPr>
+            <p:ph type="body" idx="81"/>
           </p:nvPr>
         </p:nvSpPr>
         <p:spPr>
           <a:xfrm xmlns:a="http://schemas.openxmlformats.org/drawingml/2006/main">
-            <a:off x="723900" y="5829300"/>
-            <a:ext cx="1809750" cy="361950"/>
+            <a:off x="2647950" y="5657850"/>
+            <a:ext cx="8820150" cy="647700"/>
           </a:xfrm>
           <a:prstGeom xmlns:a="http://schemas.openxmlformats.org/drawingml/2006/main" prst="rect">
             <a:avLst/>
@@ -12221,78 +11944,7 @@
           </a:ln>
         </p:spPr>
         <p:txBody>
-          <a:bodyPr xmlns:a="http://schemas.openxmlformats.org/drawingml/2006/main" wrap="square" lIns="0" tIns="0" rIns="0" bIns="0" anchor="t">
-            <a:noAutofit/>
-          </a:bodyPr>
-          <a:lstStyle xmlns:a="http://schemas.openxmlformats.org/drawingml/2006/main">
-            <a:lvl1pPr>
-              <a:defRPr sz="1650" b="1">
-                <a:solidFill>
-                  <a:schemeClr val="accent2"/>
-                </a:solidFill>
-                <a:latin typeface="+mn-lt"/>
-                <a:ea typeface="+mn-ea"/>
-                <a:cs typeface="+mn-cs"/>
-              </a:defRPr>
-            </a:lvl1pPr>
-          </a:lstStyle>
-          <a:p xmlns:a="http://schemas.openxmlformats.org/drawingml/2006/main">
-            <a:pPr>
-              <a:defRPr sz="1650" b="1">
-                <a:solidFill>
-                  <a:schemeClr val="accent2"/>
-                </a:solidFill>
-                <a:latin typeface="+mn-lt"/>
-                <a:ea typeface="+mn-ea"/>
-                <a:cs typeface="+mn-cs"/>
-              </a:defRPr>
-            </a:pPr>
-            <a:r>
-              <a:rPr sz="1650" b="1">
-                <a:solidFill>
-                  <a:schemeClr val="accent2"/>
-                </a:solidFill>
-                <a:latin typeface="+mn-lt"/>
-                <a:ea typeface="+mn-ea"/>
-                <a:cs typeface="+mn-cs"/>
-              </a:rPr>
-              <a:t>結論ラベル</a:t>
-            </a:r>
-          </a:p>
-        </p:txBody>
-      </p:sp>
-      <p:sp>
-        <p:nvSpPr>
-          <p:cNvPr id="22" name="結論本文">
-            <a:extLst xmlns:a="http://schemas.openxmlformats.org/drawingml/2006/main">
-              <a:ext uri="{FF2B5EF4-FFF2-40B4-BE49-F238E27FC236}">
-                <a16:creationId xmlns:a16="http://schemas.microsoft.com/office/drawing/2014/main" id="{3756C9A1-6D79-4DE1-9777-32799F5B8CC7}"/>
-              </a:ext>
-            </a:extLst>
-          </p:cNvPr>
-          <p:cNvSpPr>
-            <a:spLocks xmlns:a="http://schemas.openxmlformats.org/drawingml/2006/main" noGrp="1"/>
-          </p:cNvSpPr>
-          <p:nvPr>
-            <p:ph type="body" idx="81"/>
-          </p:nvPr>
-        </p:nvSpPr>
-        <p:spPr>
-          <a:xfrm xmlns:a="http://schemas.openxmlformats.org/drawingml/2006/main">
-            <a:off x="2647950" y="5791200"/>
-            <a:ext cx="8820150" cy="457200"/>
-          </a:xfrm>
-          <a:prstGeom xmlns:a="http://schemas.openxmlformats.org/drawingml/2006/main" prst="rect">
-            <a:avLst/>
-          </a:prstGeom>
-          <a:noFill xmlns:a="http://schemas.openxmlformats.org/drawingml/2006/main"/>
-          <a:ln xmlns:a="http://schemas.openxmlformats.org/drawingml/2006/main" w="0">
-            <a:noFill/>
-            <a:prstDash val="solid"/>
-          </a:ln>
-        </p:spPr>
-        <p:txBody>
-          <a:bodyPr xmlns:a="http://schemas.openxmlformats.org/drawingml/2006/main" wrap="square" lIns="0" tIns="0" rIns="0" bIns="0" anchor="t">
+          <a:bodyPr xmlns:a="http://schemas.openxmlformats.org/drawingml/2006/main" wrap="square" lIns="0" tIns="0" rIns="0" bIns="0" anchor="ctr">
             <a:noAutofit/>
           </a:bodyPr>
           <a:lstStyle xmlns:a="http://schemas.openxmlformats.org/drawingml/2006/main">
@@ -13192,9 +12844,7 @@
         </p:nvSpPr>
         <p:spPr/>
         <p:txBody>
-          <a:bodyPr xmlns:a="http://schemas.openxmlformats.org/drawingml/2006/main" wrap="square" lIns="0" tIns="0" rIns="0" bIns="0" anchor="t">
-            <a:noAutofit/>
-          </a:bodyPr>
+          <a:bodyPr xmlns:a="http://schemas.openxmlformats.org/drawingml/2006/main"/>
           <a:lstStyle xmlns:a="http://schemas.openxmlformats.org/drawingml/2006/main"/>
           <a:p xmlns:a="http://schemas.openxmlformats.org/drawingml/2006/main">
             <a:pPr>
@@ -13239,9 +12889,7 @@
         </p:nvSpPr>
         <p:spPr/>
         <p:txBody>
-          <a:bodyPr xmlns:a="http://schemas.openxmlformats.org/drawingml/2006/main" wrap="square" lIns="0" tIns="0" rIns="0" bIns="0" anchor="t">
-            <a:noAutofit/>
-          </a:bodyPr>
+          <a:bodyPr xmlns:a="http://schemas.openxmlformats.org/drawingml/2006/main"/>
           <a:lstStyle xmlns:a="http://schemas.openxmlformats.org/drawingml/2006/main"/>
           <a:p xmlns:a="http://schemas.openxmlformats.org/drawingml/2006/main">
             <a:pPr>
@@ -13830,9 +13478,7 @@
         </p:nvSpPr>
         <p:spPr/>
         <p:txBody>
-          <a:bodyPr xmlns:a="http://schemas.openxmlformats.org/drawingml/2006/main" wrap="square" lIns="0" tIns="0" rIns="0" bIns="0" anchor="t">
-            <a:noAutofit/>
-          </a:bodyPr>
+          <a:bodyPr xmlns:a="http://schemas.openxmlformats.org/drawingml/2006/main"/>
           <a:lstStyle xmlns:a="http://schemas.openxmlformats.org/drawingml/2006/main"/>
           <a:p xmlns:a="http://schemas.openxmlformats.org/drawingml/2006/main">
             <a:pPr>
@@ -13877,9 +13523,7 @@
         </p:nvSpPr>
         <p:spPr/>
         <p:txBody>
-          <a:bodyPr xmlns:a="http://schemas.openxmlformats.org/drawingml/2006/main" wrap="square" lIns="0" tIns="0" rIns="0" bIns="0" anchor="t">
-            <a:noAutofit/>
-          </a:bodyPr>
+          <a:bodyPr xmlns:a="http://schemas.openxmlformats.org/drawingml/2006/main"/>
           <a:lstStyle xmlns:a="http://schemas.openxmlformats.org/drawingml/2006/main"/>
           <a:p xmlns:a="http://schemas.openxmlformats.org/drawingml/2006/main">
             <a:pPr>
@@ -15097,9 +14741,7 @@
         </p:nvSpPr>
         <p:spPr/>
         <p:txBody>
-          <a:bodyPr xmlns:a="http://schemas.openxmlformats.org/drawingml/2006/main" wrap="square" lIns="0" tIns="0" rIns="0" bIns="0" anchor="t">
-            <a:noAutofit/>
-          </a:bodyPr>
+          <a:bodyPr xmlns:a="http://schemas.openxmlformats.org/drawingml/2006/main"/>
           <a:lstStyle xmlns:a="http://schemas.openxmlformats.org/drawingml/2006/main"/>
           <a:p xmlns:a="http://schemas.openxmlformats.org/drawingml/2006/main">
             <a:pPr>
@@ -15144,9 +14786,7 @@
         </p:nvSpPr>
         <p:spPr/>
         <p:txBody>
-          <a:bodyPr xmlns:a="http://schemas.openxmlformats.org/drawingml/2006/main" wrap="square" lIns="0" tIns="0" rIns="0" bIns="0" anchor="t">
-            <a:noAutofit/>
-          </a:bodyPr>
+          <a:bodyPr xmlns:a="http://schemas.openxmlformats.org/drawingml/2006/main"/>
           <a:lstStyle xmlns:a="http://schemas.openxmlformats.org/drawingml/2006/main"/>
           <a:p xmlns:a="http://schemas.openxmlformats.org/drawingml/2006/main">
             <a:pPr>
@@ -15453,9 +15093,7 @@
         </p:nvSpPr>
         <p:spPr/>
         <p:txBody>
-          <a:bodyPr xmlns:a="http://schemas.openxmlformats.org/drawingml/2006/main" wrap="square" lIns="0" tIns="0" rIns="0" bIns="0" anchor="t">
-            <a:noAutofit/>
-          </a:bodyPr>
+          <a:bodyPr xmlns:a="http://schemas.openxmlformats.org/drawingml/2006/main"/>
           <a:lstStyle xmlns:a="http://schemas.openxmlformats.org/drawingml/2006/main"/>
           <a:p xmlns:a="http://schemas.openxmlformats.org/drawingml/2006/main">
             <a:pPr>
@@ -15500,9 +15138,7 @@
         </p:nvSpPr>
         <p:spPr/>
         <p:txBody>
-          <a:bodyPr xmlns:a="http://schemas.openxmlformats.org/drawingml/2006/main" wrap="square" lIns="0" tIns="0" rIns="0" bIns="0" anchor="t">
-            <a:noAutofit/>
-          </a:bodyPr>
+          <a:bodyPr xmlns:a="http://schemas.openxmlformats.org/drawingml/2006/main"/>
           <a:lstStyle xmlns:a="http://schemas.openxmlformats.org/drawingml/2006/main"/>
           <a:p xmlns:a="http://schemas.openxmlformats.org/drawingml/2006/main">
             <a:pPr>
@@ -17398,9 +17034,7 @@
         </p:nvSpPr>
         <p:spPr/>
         <p:txBody>
-          <a:bodyPr xmlns:a="http://schemas.openxmlformats.org/drawingml/2006/main" wrap="square" lIns="0" tIns="0" rIns="0" bIns="0" anchor="t">
-            <a:noAutofit/>
-          </a:bodyPr>
+          <a:bodyPr xmlns:a="http://schemas.openxmlformats.org/drawingml/2006/main"/>
           <a:lstStyle xmlns:a="http://schemas.openxmlformats.org/drawingml/2006/main"/>
           <a:p xmlns:a="http://schemas.openxmlformats.org/drawingml/2006/main">
             <a:pPr>
@@ -17445,9 +17079,7 @@
         </p:nvSpPr>
         <p:spPr/>
         <p:txBody>
-          <a:bodyPr xmlns:a="http://schemas.openxmlformats.org/drawingml/2006/main" wrap="square" lIns="0" tIns="0" rIns="0" bIns="0" anchor="t">
-            <a:noAutofit/>
-          </a:bodyPr>
+          <a:bodyPr xmlns:a="http://schemas.openxmlformats.org/drawingml/2006/main"/>
           <a:lstStyle xmlns:a="http://schemas.openxmlformats.org/drawingml/2006/main"/>
           <a:p xmlns:a="http://schemas.openxmlformats.org/drawingml/2006/main">
             <a:pPr>
@@ -18009,9 +17641,7 @@
         </p:nvSpPr>
         <p:spPr/>
         <p:txBody>
-          <a:bodyPr xmlns:a="http://schemas.openxmlformats.org/drawingml/2006/main" wrap="square" lIns="0" tIns="0" rIns="0" bIns="0" anchor="t">
-            <a:noAutofit/>
-          </a:bodyPr>
+          <a:bodyPr xmlns:a="http://schemas.openxmlformats.org/drawingml/2006/main"/>
           <a:lstStyle xmlns:a="http://schemas.openxmlformats.org/drawingml/2006/main"/>
           <a:p xmlns:a="http://schemas.openxmlformats.org/drawingml/2006/main">
             <a:pPr>
@@ -18056,9 +17686,7 @@
         </p:nvSpPr>
         <p:spPr/>
         <p:txBody>
-          <a:bodyPr xmlns:a="http://schemas.openxmlformats.org/drawingml/2006/main" wrap="square" lIns="0" tIns="0" rIns="0" bIns="0" anchor="t">
-            <a:noAutofit/>
-          </a:bodyPr>
+          <a:bodyPr xmlns:a="http://schemas.openxmlformats.org/drawingml/2006/main"/>
           <a:lstStyle xmlns:a="http://schemas.openxmlformats.org/drawingml/2006/main"/>
           <a:p xmlns:a="http://schemas.openxmlformats.org/drawingml/2006/main">
             <a:pPr>
@@ -18480,9 +18108,7 @@
         </p:nvSpPr>
         <p:spPr/>
         <p:txBody>
-          <a:bodyPr xmlns:a="http://schemas.openxmlformats.org/drawingml/2006/main" wrap="square" lIns="0" tIns="0" rIns="0" bIns="0" anchor="t">
-            <a:noAutofit/>
-          </a:bodyPr>
+          <a:bodyPr xmlns:a="http://schemas.openxmlformats.org/drawingml/2006/main"/>
           <a:lstStyle xmlns:a="http://schemas.openxmlformats.org/drawingml/2006/main"/>
           <a:p xmlns:a="http://schemas.openxmlformats.org/drawingml/2006/main">
             <a:pPr>
@@ -18527,9 +18153,7 @@
         </p:nvSpPr>
         <p:spPr/>
         <p:txBody>
-          <a:bodyPr xmlns:a="http://schemas.openxmlformats.org/drawingml/2006/main" wrap="square" lIns="0" tIns="0" rIns="0" bIns="0" anchor="t">
-            <a:noAutofit/>
-          </a:bodyPr>
+          <a:bodyPr xmlns:a="http://schemas.openxmlformats.org/drawingml/2006/main"/>
           <a:lstStyle xmlns:a="http://schemas.openxmlformats.org/drawingml/2006/main"/>
           <a:p xmlns:a="http://schemas.openxmlformats.org/drawingml/2006/main">
             <a:pPr>
@@ -18742,9 +18366,7 @@
         </p:nvSpPr>
         <p:spPr/>
         <p:txBody>
-          <a:bodyPr xmlns:a="http://schemas.openxmlformats.org/drawingml/2006/main" wrap="square" lIns="0" tIns="0" rIns="0" bIns="0" anchor="t">
-            <a:noAutofit/>
-          </a:bodyPr>
+          <a:bodyPr xmlns:a="http://schemas.openxmlformats.org/drawingml/2006/main"/>
           <a:lstStyle xmlns:a="http://schemas.openxmlformats.org/drawingml/2006/main"/>
           <a:p xmlns:a="http://schemas.openxmlformats.org/drawingml/2006/main">
             <a:pPr>
@@ -18789,9 +18411,7 @@
         </p:nvSpPr>
         <p:spPr/>
         <p:txBody>
-          <a:bodyPr xmlns:a="http://schemas.openxmlformats.org/drawingml/2006/main" wrap="square" lIns="0" tIns="0" rIns="0" bIns="0" anchor="t">
-            <a:noAutofit/>
-          </a:bodyPr>
+          <a:bodyPr xmlns:a="http://schemas.openxmlformats.org/drawingml/2006/main"/>
           <a:lstStyle xmlns:a="http://schemas.openxmlformats.org/drawingml/2006/main"/>
           <a:p xmlns:a="http://schemas.openxmlformats.org/drawingml/2006/main">
             <a:pPr>
@@ -19930,9 +19550,7 @@
         </p:nvSpPr>
         <p:spPr/>
         <p:txBody>
-          <a:bodyPr xmlns:a="http://schemas.openxmlformats.org/drawingml/2006/main" wrap="square" lIns="0" tIns="0" rIns="0" bIns="0" anchor="t">
-            <a:noAutofit/>
-          </a:bodyPr>
+          <a:bodyPr xmlns:a="http://schemas.openxmlformats.org/drawingml/2006/main"/>
           <a:lstStyle xmlns:a="http://schemas.openxmlformats.org/drawingml/2006/main"/>
           <a:p xmlns:a="http://schemas.openxmlformats.org/drawingml/2006/main">
             <a:pPr>
@@ -19977,9 +19595,7 @@
         </p:nvSpPr>
         <p:spPr/>
         <p:txBody>
-          <a:bodyPr xmlns:a="http://schemas.openxmlformats.org/drawingml/2006/main" wrap="square" lIns="0" tIns="0" rIns="0" bIns="0" anchor="t">
-            <a:noAutofit/>
-          </a:bodyPr>
+          <a:bodyPr xmlns:a="http://schemas.openxmlformats.org/drawingml/2006/main"/>
           <a:lstStyle xmlns:a="http://schemas.openxmlformats.org/drawingml/2006/main"/>
           <a:p xmlns:a="http://schemas.openxmlformats.org/drawingml/2006/main">
             <a:pPr>
@@ -20564,9 +20180,7 @@
         </p:nvSpPr>
         <p:spPr/>
         <p:txBody>
-          <a:bodyPr xmlns:a="http://schemas.openxmlformats.org/drawingml/2006/main" wrap="square" lIns="0" tIns="0" rIns="0" bIns="0" anchor="t">
-            <a:noAutofit/>
-          </a:bodyPr>
+          <a:bodyPr xmlns:a="http://schemas.openxmlformats.org/drawingml/2006/main"/>
           <a:lstStyle xmlns:a="http://schemas.openxmlformats.org/drawingml/2006/main"/>
           <a:p xmlns:a="http://schemas.openxmlformats.org/drawingml/2006/main">
             <a:pPr>
@@ -20611,9 +20225,7 @@
         </p:nvSpPr>
         <p:spPr/>
         <p:txBody>
-          <a:bodyPr xmlns:a="http://schemas.openxmlformats.org/drawingml/2006/main" wrap="square" lIns="0" tIns="0" rIns="0" bIns="0" anchor="t">
-            <a:noAutofit/>
-          </a:bodyPr>
+          <a:bodyPr xmlns:a="http://schemas.openxmlformats.org/drawingml/2006/main"/>
           <a:lstStyle xmlns:a="http://schemas.openxmlformats.org/drawingml/2006/main"/>
           <a:p xmlns:a="http://schemas.openxmlformats.org/drawingml/2006/main">
             <a:pPr>
@@ -21384,9 +20996,7 @@
         </p:nvSpPr>
         <p:spPr/>
         <p:txBody>
-          <a:bodyPr xmlns:a="http://schemas.openxmlformats.org/drawingml/2006/main" wrap="square" lIns="0" tIns="0" rIns="0" bIns="0" anchor="t">
-            <a:noAutofit/>
-          </a:bodyPr>
+          <a:bodyPr xmlns:a="http://schemas.openxmlformats.org/drawingml/2006/main"/>
           <a:lstStyle xmlns:a="http://schemas.openxmlformats.org/drawingml/2006/main"/>
           <a:p xmlns:a="http://schemas.openxmlformats.org/drawingml/2006/main">
             <a:pPr>
@@ -21431,9 +21041,7 @@
         </p:nvSpPr>
         <p:spPr/>
         <p:txBody>
-          <a:bodyPr xmlns:a="http://schemas.openxmlformats.org/drawingml/2006/main" wrap="square" lIns="0" tIns="0" rIns="0" bIns="0" anchor="t">
-            <a:noAutofit/>
-          </a:bodyPr>
+          <a:bodyPr xmlns:a="http://schemas.openxmlformats.org/drawingml/2006/main"/>
           <a:lstStyle xmlns:a="http://schemas.openxmlformats.org/drawingml/2006/main"/>
           <a:p xmlns:a="http://schemas.openxmlformats.org/drawingml/2006/main">
             <a:pPr>
@@ -22394,9 +22002,7 @@
         </p:nvSpPr>
         <p:spPr/>
         <p:txBody>
-          <a:bodyPr xmlns:a="http://schemas.openxmlformats.org/drawingml/2006/main" wrap="square" lIns="0" tIns="0" rIns="0" bIns="0" anchor="t">
-            <a:noAutofit/>
-          </a:bodyPr>
+          <a:bodyPr xmlns:a="http://schemas.openxmlformats.org/drawingml/2006/main"/>
           <a:lstStyle xmlns:a="http://schemas.openxmlformats.org/drawingml/2006/main"/>
           <a:p xmlns:a="http://schemas.openxmlformats.org/drawingml/2006/main">
             <a:pPr>
@@ -22441,9 +22047,7 @@
         </p:nvSpPr>
         <p:spPr/>
         <p:txBody>
-          <a:bodyPr xmlns:a="http://schemas.openxmlformats.org/drawingml/2006/main" wrap="square" lIns="0" tIns="0" rIns="0" bIns="0" anchor="t">
-            <a:noAutofit/>
-          </a:bodyPr>
+          <a:bodyPr xmlns:a="http://schemas.openxmlformats.org/drawingml/2006/main"/>
           <a:lstStyle xmlns:a="http://schemas.openxmlformats.org/drawingml/2006/main"/>
           <a:p xmlns:a="http://schemas.openxmlformats.org/drawingml/2006/main">
             <a:pPr>
@@ -22656,9 +22260,7 @@
         </p:nvSpPr>
         <p:spPr/>
         <p:txBody>
-          <a:bodyPr xmlns:a="http://schemas.openxmlformats.org/drawingml/2006/main" wrap="square" lIns="0" tIns="0" rIns="0" bIns="0" anchor="t">
-            <a:noAutofit/>
-          </a:bodyPr>
+          <a:bodyPr xmlns:a="http://schemas.openxmlformats.org/drawingml/2006/main"/>
           <a:lstStyle xmlns:a="http://schemas.openxmlformats.org/drawingml/2006/main"/>
           <a:p xmlns:a="http://schemas.openxmlformats.org/drawingml/2006/main">
             <a:pPr>
@@ -22703,9 +22305,7 @@
         </p:nvSpPr>
         <p:spPr/>
         <p:txBody>
-          <a:bodyPr xmlns:a="http://schemas.openxmlformats.org/drawingml/2006/main" wrap="square" lIns="0" tIns="0" rIns="0" bIns="0" anchor="t">
-            <a:noAutofit/>
-          </a:bodyPr>
+          <a:bodyPr xmlns:a="http://schemas.openxmlformats.org/drawingml/2006/main"/>
           <a:lstStyle xmlns:a="http://schemas.openxmlformats.org/drawingml/2006/main"/>
           <a:p xmlns:a="http://schemas.openxmlformats.org/drawingml/2006/main">
             <a:pPr>
@@ -23707,9 +23307,7 @@
         </p:nvSpPr>
         <p:spPr/>
         <p:txBody>
-          <a:bodyPr xmlns:a="http://schemas.openxmlformats.org/drawingml/2006/main" wrap="square" lIns="0" tIns="0" rIns="0" bIns="0" anchor="t">
-            <a:noAutofit/>
-          </a:bodyPr>
+          <a:bodyPr xmlns:a="http://schemas.openxmlformats.org/drawingml/2006/main"/>
           <a:lstStyle xmlns:a="http://schemas.openxmlformats.org/drawingml/2006/main"/>
           <a:p xmlns:a="http://schemas.openxmlformats.org/drawingml/2006/main">
             <a:pPr>
@@ -23754,9 +23352,7 @@
         </p:nvSpPr>
         <p:spPr/>
         <p:txBody>
-          <a:bodyPr xmlns:a="http://schemas.openxmlformats.org/drawingml/2006/main" wrap="square" lIns="0" tIns="0" rIns="0" bIns="0" anchor="t">
-            <a:noAutofit/>
-          </a:bodyPr>
+          <a:bodyPr xmlns:a="http://schemas.openxmlformats.org/drawingml/2006/main"/>
           <a:lstStyle xmlns:a="http://schemas.openxmlformats.org/drawingml/2006/main"/>
           <a:p xmlns:a="http://schemas.openxmlformats.org/drawingml/2006/main">
             <a:pPr>
